--- a/public/lessons/year-6-maths/autumn/week-6/solve-missing-number-expressions/teaching-powerpoint-v1.pptx
+++ b/public/lessons/year-6-maths/autumn/week-6/solve-missing-number-expressions/teaching-powerpoint-v1.pptx
@@ -2,24 +2,24 @@
 <file path=ppt/presentation.xml><?xml version="1.0" encoding="utf-8"?>
 <p:presentation xmlns:p="http://schemas.openxmlformats.org/presentationml/2006/main">
   <p:sldMasterIdLst>
-    <p:sldMasterId xmlns:r="http://schemas.openxmlformats.org/officeDocument/2006/relationships" id="2147483648" r:id="R089856df34fc4cfa"/>
+    <p:sldMasterId xmlns:r="http://schemas.openxmlformats.org/officeDocument/2006/relationships" id="2147483648" r:id="Raf60168db9754ab5"/>
   </p:sldMasterIdLst>
   <p:notesMasterIdLst>
-    <p:notesMasterId xmlns:r="http://schemas.openxmlformats.org/officeDocument/2006/relationships" r:id="R17dc59744d844d1d"/>
+    <p:notesMasterId xmlns:r="http://schemas.openxmlformats.org/officeDocument/2006/relationships" r:id="Rc56f04a463db43cd"/>
   </p:notesMasterIdLst>
   <p:sldIdLst>
-    <p:sldId xmlns:r="http://schemas.openxmlformats.org/officeDocument/2006/relationships" id="256" r:id="R49f6fbd34a264dc3"/>
-    <p:sldId xmlns:r="http://schemas.openxmlformats.org/officeDocument/2006/relationships" id="257" r:id="R1e11c57b839e4c67"/>
-    <p:sldId xmlns:r="http://schemas.openxmlformats.org/officeDocument/2006/relationships" id="258" r:id="R0cfc945edb164e9a"/>
-    <p:sldId xmlns:r="http://schemas.openxmlformats.org/officeDocument/2006/relationships" id="259" r:id="Rdc959efbfa634733"/>
-    <p:sldId xmlns:r="http://schemas.openxmlformats.org/officeDocument/2006/relationships" id="260" r:id="R1e6b27dc36424a3a"/>
-    <p:sldId xmlns:r="http://schemas.openxmlformats.org/officeDocument/2006/relationships" id="261" r:id="R768352b96e424811"/>
-    <p:sldId xmlns:r="http://schemas.openxmlformats.org/officeDocument/2006/relationships" id="262" r:id="Rbfe53719e5874ef3"/>
-    <p:sldId xmlns:r="http://schemas.openxmlformats.org/officeDocument/2006/relationships" id="263" r:id="R088d804730944d14"/>
-    <p:sldId xmlns:r="http://schemas.openxmlformats.org/officeDocument/2006/relationships" id="264" r:id="R8f526e688b8a4eea"/>
-    <p:sldId xmlns:r="http://schemas.openxmlformats.org/officeDocument/2006/relationships" id="265" r:id="R51b29991b4c04d9f"/>
-    <p:sldId xmlns:r="http://schemas.openxmlformats.org/officeDocument/2006/relationships" id="266" r:id="Rcaf6b575b9c44df7"/>
-    <p:sldId xmlns:r="http://schemas.openxmlformats.org/officeDocument/2006/relationships" id="267" r:id="R1d8b19dc96ec449c"/>
+    <p:sldId xmlns:r="http://schemas.openxmlformats.org/officeDocument/2006/relationships" id="256" r:id="R8f640305a57747ab"/>
+    <p:sldId xmlns:r="http://schemas.openxmlformats.org/officeDocument/2006/relationships" id="257" r:id="R7c506fd21dc44423"/>
+    <p:sldId xmlns:r="http://schemas.openxmlformats.org/officeDocument/2006/relationships" id="258" r:id="Rdf0ef165519a454d"/>
+    <p:sldId xmlns:r="http://schemas.openxmlformats.org/officeDocument/2006/relationships" id="259" r:id="R00f9409ff13a4384"/>
+    <p:sldId xmlns:r="http://schemas.openxmlformats.org/officeDocument/2006/relationships" id="260" r:id="Rbb606c25c240419f"/>
+    <p:sldId xmlns:r="http://schemas.openxmlformats.org/officeDocument/2006/relationships" id="261" r:id="R276668e74c12483e"/>
+    <p:sldId xmlns:r="http://schemas.openxmlformats.org/officeDocument/2006/relationships" id="262" r:id="R8a8d154257b54d5a"/>
+    <p:sldId xmlns:r="http://schemas.openxmlformats.org/officeDocument/2006/relationships" id="263" r:id="R16a8d39b50fc416d"/>
+    <p:sldId xmlns:r="http://schemas.openxmlformats.org/officeDocument/2006/relationships" id="264" r:id="R4b81adb7d18b44c9"/>
+    <p:sldId xmlns:r="http://schemas.openxmlformats.org/officeDocument/2006/relationships" id="265" r:id="Re6a8423a118d400d"/>
+    <p:sldId xmlns:r="http://schemas.openxmlformats.org/officeDocument/2006/relationships" id="266" r:id="Re4b6db351673423b"/>
+    <p:sldId xmlns:r="http://schemas.openxmlformats.org/officeDocument/2006/relationships" id="267" r:id="Rac9ae425a0ec4e57"/>
   </p:sldIdLst>
   <p:sldSz cx="12192000" cy="6858000"/>
   <p:notesSz cx="6858000" cy="9144000"/>
@@ -873,7 +873,7 @@
           <a:lstStyle xmlns:a="http://schemas.openxmlformats.org/drawingml/2006/main"/>
           <a:p xmlns:a="http://schemas.openxmlformats.org/drawingml/2006/main">
             <a:r>
-              <a:t>I do. Reveal the question, setup and each calculation stage one click at a time. Pupils watch before copying. Model answer: n = 7.</a:t>
+              <a:t>I do. Reveal the question, then reveal each mathematical change one click at a time. Point to the numbers and operation that changed before moving to the next line. Final answer: n = 7.</a:t>
             </a:r>
           </a:p>
         </p:txBody>
@@ -1291,7 +1291,7 @@
   </p:cSld>
   <p:clrMap bg1="lt1" tx1="dk1" bg2="lt2" tx2="dk2" accent1="accent1" accent2="accent2" accent3="accent3" accent4="accent4" accent5="accent5" accent6="accent6" hlink="hlink" folHlink="folHlink"/>
   <p:sldLayoutIdLst>
-    <p:sldLayoutId xmlns:r="http://schemas.openxmlformats.org/officeDocument/2006/relationships" id="2147483649" r:id="Rd56ad484750a44a3"/>
+    <p:sldLayoutId xmlns:r="http://schemas.openxmlformats.org/officeDocument/2006/relationships" id="2147483649" r:id="R794f09c567f64ee9"/>
   </p:sldLayoutIdLst>
   <p:txStyles>
     <p:titleStyle>
@@ -1842,7 +1842,7 @@
           <p:cNvPr id="12" name="">
             <a:extLst xmlns:a="http://schemas.openxmlformats.org/drawingml/2006/main">
               <a:ext uri="{FF2B5EF4-FFF2-40B4-BE49-F238E27FC236}">
-                <a16:creationId xmlns:a16="http://schemas.microsoft.com/office/drawing/2014/main" id="{129E1672-2FAC-4D31-9A90-770AA1A26EE3}"/>
+                <a16:creationId xmlns:a16="http://schemas.microsoft.com/office/drawing/2014/main" id="{4F5759B3-7EDC-46F2-9DA9-99475F251E4D}"/>
               </a:ext>
             </a:extLst>
           </p:cNvPr>
@@ -1874,7 +1874,7 @@
           <p:cNvPr id="2" name="">
             <a:extLst xmlns:a="http://schemas.openxmlformats.org/drawingml/2006/main">
               <a:ext uri="{FF2B5EF4-FFF2-40B4-BE49-F238E27FC236}">
-                <a16:creationId xmlns:a16="http://schemas.microsoft.com/office/drawing/2014/main" id="{59A1E9C5-7B71-4484-9B31-3D6E4A63CA4B}"/>
+                <a16:creationId xmlns:a16="http://schemas.microsoft.com/office/drawing/2014/main" id="{D8E1F1C6-A992-43FE-8E1B-431EF271ABEE}"/>
               </a:ext>
             </a:extLst>
           </p:cNvPr>
@@ -1931,7 +1931,7 @@
           <p:cNvPr id="3" name="">
             <a:extLst xmlns:a="http://schemas.openxmlformats.org/drawingml/2006/main">
               <a:ext uri="{FF2B5EF4-FFF2-40B4-BE49-F238E27FC236}">
-                <a16:creationId xmlns:a16="http://schemas.microsoft.com/office/drawing/2014/main" id="{56D335D6-80E7-4495-B577-850B7D4E21F1}"/>
+                <a16:creationId xmlns:a16="http://schemas.microsoft.com/office/drawing/2014/main" id="{9DB1E3C2-7987-4A72-8C87-A20BA27438A6}"/>
               </a:ext>
             </a:extLst>
           </p:cNvPr>
@@ -1965,7 +1965,7 @@
           <p:cNvPr id="4" name="">
             <a:extLst xmlns:a="http://schemas.openxmlformats.org/drawingml/2006/main">
               <a:ext uri="{FF2B5EF4-FFF2-40B4-BE49-F238E27FC236}">
-                <a16:creationId xmlns:a16="http://schemas.microsoft.com/office/drawing/2014/main" id="{7FE098BC-1DB8-415F-BBB7-366B284F733B}"/>
+                <a16:creationId xmlns:a16="http://schemas.microsoft.com/office/drawing/2014/main" id="{9812BE80-8424-4927-BFB1-89D9109E7F91}"/>
               </a:ext>
             </a:extLst>
           </p:cNvPr>
@@ -2022,7 +2022,7 @@
           <p:cNvPr id="5" name="">
             <a:extLst xmlns:a="http://schemas.openxmlformats.org/drawingml/2006/main">
               <a:ext uri="{FF2B5EF4-FFF2-40B4-BE49-F238E27FC236}">
-                <a16:creationId xmlns:a16="http://schemas.microsoft.com/office/drawing/2014/main" id="{711CD7DD-1FE1-4882-A4F5-066B61AEDB17}"/>
+                <a16:creationId xmlns:a16="http://schemas.microsoft.com/office/drawing/2014/main" id="{E7BA3E77-9DFD-4706-A97F-63B9BC4483D3}"/>
               </a:ext>
             </a:extLst>
           </p:cNvPr>
@@ -2079,7 +2079,7 @@
           <p:cNvPr id="6" name="">
             <a:extLst xmlns:a="http://schemas.openxmlformats.org/drawingml/2006/main">
               <a:ext uri="{FF2B5EF4-FFF2-40B4-BE49-F238E27FC236}">
-                <a16:creationId xmlns:a16="http://schemas.microsoft.com/office/drawing/2014/main" id="{F5D9BA6D-BEA5-44DD-BE0D-4A899367932C}"/>
+                <a16:creationId xmlns:a16="http://schemas.microsoft.com/office/drawing/2014/main" id="{DC998466-F413-423A-84E4-3D4442AC0201}"/>
               </a:ext>
             </a:extLst>
           </p:cNvPr>
@@ -2113,7 +2113,7 @@
           <p:cNvPr id="7" name="">
             <a:extLst xmlns:a="http://schemas.openxmlformats.org/drawingml/2006/main">
               <a:ext uri="{FF2B5EF4-FFF2-40B4-BE49-F238E27FC236}">
-                <a16:creationId xmlns:a16="http://schemas.microsoft.com/office/drawing/2014/main" id="{B259D7A4-9D55-4D80-996E-DC699880D956}"/>
+                <a16:creationId xmlns:a16="http://schemas.microsoft.com/office/drawing/2014/main" id="{26739901-9E00-490D-829A-F6905411113F}"/>
               </a:ext>
             </a:extLst>
           </p:cNvPr>
@@ -2170,7 +2170,7 @@
           <p:cNvPr id="8" name="">
             <a:extLst xmlns:a="http://schemas.openxmlformats.org/drawingml/2006/main">
               <a:ext uri="{FF2B5EF4-FFF2-40B4-BE49-F238E27FC236}">
-                <a16:creationId xmlns:a16="http://schemas.microsoft.com/office/drawing/2014/main" id="{D4386652-32D5-42D5-A74E-3E0DC840CA82}"/>
+                <a16:creationId xmlns:a16="http://schemas.microsoft.com/office/drawing/2014/main" id="{FFCD1725-F1AB-41C0-9E5F-2BFAA35E3A38}"/>
               </a:ext>
             </a:extLst>
           </p:cNvPr>
@@ -2227,7 +2227,7 @@
           <p:cNvPr id="9" name="">
             <a:extLst xmlns:a="http://schemas.openxmlformats.org/drawingml/2006/main">
               <a:ext uri="{FF2B5EF4-FFF2-40B4-BE49-F238E27FC236}">
-                <a16:creationId xmlns:a16="http://schemas.microsoft.com/office/drawing/2014/main" id="{33B9B29D-3A12-48A4-8839-E32C75413F78}"/>
+                <a16:creationId xmlns:a16="http://schemas.microsoft.com/office/drawing/2014/main" id="{AD2B0C4F-1339-4759-B650-CEFBEC3A99F3}"/>
               </a:ext>
             </a:extLst>
           </p:cNvPr>
@@ -2284,7 +2284,7 @@
           <p:cNvPr id="10" name="">
             <a:extLst xmlns:a="http://schemas.openxmlformats.org/drawingml/2006/main">
               <a:ext uri="{FF2B5EF4-FFF2-40B4-BE49-F238E27FC236}">
-                <a16:creationId xmlns:a16="http://schemas.microsoft.com/office/drawing/2014/main" id="{6D82C909-9AD1-4E5C-A884-B3C503A04F61}"/>
+                <a16:creationId xmlns:a16="http://schemas.microsoft.com/office/drawing/2014/main" id="{957B97C7-16F2-488D-B59C-3847FD0CD03B}"/>
               </a:ext>
             </a:extLst>
           </p:cNvPr>
@@ -2341,7 +2341,7 @@
           <p:cNvPr id="11" name="">
             <a:extLst xmlns:a="http://schemas.openxmlformats.org/drawingml/2006/main">
               <a:ext uri="{FF2B5EF4-FFF2-40B4-BE49-F238E27FC236}">
-                <a16:creationId xmlns:a16="http://schemas.microsoft.com/office/drawing/2014/main" id="{AE4ABF93-D53B-4EA2-9741-AF94531AB4DC}"/>
+                <a16:creationId xmlns:a16="http://schemas.microsoft.com/office/drawing/2014/main" id="{46493D27-10A3-4AA1-8D92-7E71A98EA3BE}"/>
               </a:ext>
             </a:extLst>
           </p:cNvPr>
@@ -2396,7 +2396,7 @@
     </p:spTree>
     <p:extLst>
       <p:ext uri="{BB962C8B-B14F-4D97-AF65-F5344CB8AC3E}">
-        <p14:creationId xmlns:p14="http://schemas.microsoft.com/office/powerpoint/2010/main" val="518894966"/>
+        <p14:creationId xmlns:p14="http://schemas.microsoft.com/office/powerpoint/2010/main" val="1662605425"/>
       </p:ext>
     </p:extLst>
   </p:cSld>
@@ -2427,7 +2427,7 @@
           <p:cNvPr id="14" name="">
             <a:extLst xmlns:a="http://schemas.openxmlformats.org/drawingml/2006/main">
               <a:ext uri="{FF2B5EF4-FFF2-40B4-BE49-F238E27FC236}">
-                <a16:creationId xmlns:a16="http://schemas.microsoft.com/office/drawing/2014/main" id="{D4A241CA-0293-41BD-980A-FE75366A1E61}"/>
+                <a16:creationId xmlns:a16="http://schemas.microsoft.com/office/drawing/2014/main" id="{1E049ACD-A66A-41AD-BE75-45309587EA3C}"/>
               </a:ext>
             </a:extLst>
           </p:cNvPr>
@@ -2459,7 +2459,7 @@
           <p:cNvPr id="2" name="">
             <a:extLst xmlns:a="http://schemas.openxmlformats.org/drawingml/2006/main">
               <a:ext uri="{FF2B5EF4-FFF2-40B4-BE49-F238E27FC236}">
-                <a16:creationId xmlns:a16="http://schemas.microsoft.com/office/drawing/2014/main" id="{BFC3E2B2-2BE5-4FFF-B99E-DB329B7091BA}"/>
+                <a16:creationId xmlns:a16="http://schemas.microsoft.com/office/drawing/2014/main" id="{0B3E9E7D-264D-4268-8683-91FECD99B7E7}"/>
               </a:ext>
             </a:extLst>
           </p:cNvPr>
@@ -2516,7 +2516,7 @@
           <p:cNvPr id="3" name="">
             <a:extLst xmlns:a="http://schemas.openxmlformats.org/drawingml/2006/main">
               <a:ext uri="{FF2B5EF4-FFF2-40B4-BE49-F238E27FC236}">
-                <a16:creationId xmlns:a16="http://schemas.microsoft.com/office/drawing/2014/main" id="{67D280F6-8834-4A83-9ABE-B6F48C9C457D}"/>
+                <a16:creationId xmlns:a16="http://schemas.microsoft.com/office/drawing/2014/main" id="{F0C652FD-6E07-47FE-ADBD-CFDCF62B0C6D}"/>
               </a:ext>
             </a:extLst>
           </p:cNvPr>
@@ -2548,7 +2548,7 @@
           <p:cNvPr id="4" name="">
             <a:extLst xmlns:a="http://schemas.openxmlformats.org/drawingml/2006/main">
               <a:ext uri="{FF2B5EF4-FFF2-40B4-BE49-F238E27FC236}">
-                <a16:creationId xmlns:a16="http://schemas.microsoft.com/office/drawing/2014/main" id="{CF167004-9939-45DA-82C9-CFCDDBFDFBFB}"/>
+                <a16:creationId xmlns:a16="http://schemas.microsoft.com/office/drawing/2014/main" id="{7297CB1B-2FB9-4500-97D5-6D92F25B70FD}"/>
               </a:ext>
             </a:extLst>
           </p:cNvPr>
@@ -2605,7 +2605,7 @@
           <p:cNvPr id="5" name="">
             <a:extLst xmlns:a="http://schemas.openxmlformats.org/drawingml/2006/main">
               <a:ext uri="{FF2B5EF4-FFF2-40B4-BE49-F238E27FC236}">
-                <a16:creationId xmlns:a16="http://schemas.microsoft.com/office/drawing/2014/main" id="{3D6B3DD1-1460-4934-B3FF-B263F2B3E870}"/>
+                <a16:creationId xmlns:a16="http://schemas.microsoft.com/office/drawing/2014/main" id="{E1DB3D44-F97F-4D85-9D53-2C7FE5DB63BA}"/>
               </a:ext>
             </a:extLst>
           </p:cNvPr>
@@ -2662,7 +2662,7 @@
           <p:cNvPr id="6" name="">
             <a:extLst xmlns:a="http://schemas.openxmlformats.org/drawingml/2006/main">
               <a:ext uri="{FF2B5EF4-FFF2-40B4-BE49-F238E27FC236}">
-                <a16:creationId xmlns:a16="http://schemas.microsoft.com/office/drawing/2014/main" id="{CF53F48F-B1F4-4633-855D-4E8C59BF0E26}"/>
+                <a16:creationId xmlns:a16="http://schemas.microsoft.com/office/drawing/2014/main" id="{24F2F681-CD93-40D2-9A54-DAF9CFEB13D1}"/>
               </a:ext>
             </a:extLst>
           </p:cNvPr>
@@ -2719,7 +2719,7 @@
           <p:cNvPr id="7" name="">
             <a:extLst xmlns:a="http://schemas.openxmlformats.org/drawingml/2006/main">
               <a:ext uri="{FF2B5EF4-FFF2-40B4-BE49-F238E27FC236}">
-                <a16:creationId xmlns:a16="http://schemas.microsoft.com/office/drawing/2014/main" id="{43F9D77F-CED1-4302-A164-90CC21A199B1}"/>
+                <a16:creationId xmlns:a16="http://schemas.microsoft.com/office/drawing/2014/main" id="{F3AD441A-C94F-46AF-96D2-293192AA66FA}"/>
               </a:ext>
             </a:extLst>
           </p:cNvPr>
@@ -2751,7 +2751,7 @@
           <p:cNvPr id="8" name="">
             <a:extLst xmlns:a="http://schemas.openxmlformats.org/drawingml/2006/main">
               <a:ext uri="{FF2B5EF4-FFF2-40B4-BE49-F238E27FC236}">
-                <a16:creationId xmlns:a16="http://schemas.microsoft.com/office/drawing/2014/main" id="{7280D4B7-54A3-49DE-80A2-E59412D385A4}"/>
+                <a16:creationId xmlns:a16="http://schemas.microsoft.com/office/drawing/2014/main" id="{FD193E03-CFF4-4659-84A6-196AAE67E6DE}"/>
               </a:ext>
             </a:extLst>
           </p:cNvPr>
@@ -2808,7 +2808,7 @@
           <p:cNvPr id="9" name="">
             <a:extLst xmlns:a="http://schemas.openxmlformats.org/drawingml/2006/main">
               <a:ext uri="{FF2B5EF4-FFF2-40B4-BE49-F238E27FC236}">
-                <a16:creationId xmlns:a16="http://schemas.microsoft.com/office/drawing/2014/main" id="{E2EB3356-7C5B-42A0-ADCF-AECFF125F264}"/>
+                <a16:creationId xmlns:a16="http://schemas.microsoft.com/office/drawing/2014/main" id="{6C0F797F-9CEF-4CEB-AA3D-6CA2AF8BEA9F}"/>
               </a:ext>
             </a:extLst>
           </p:cNvPr>
@@ -2865,7 +2865,7 @@
           <p:cNvPr id="10" name="">
             <a:extLst xmlns:a="http://schemas.openxmlformats.org/drawingml/2006/main">
               <a:ext uri="{FF2B5EF4-FFF2-40B4-BE49-F238E27FC236}">
-                <a16:creationId xmlns:a16="http://schemas.microsoft.com/office/drawing/2014/main" id="{A192A5CA-BE81-4FAE-A035-5E04710FF522}"/>
+                <a16:creationId xmlns:a16="http://schemas.microsoft.com/office/drawing/2014/main" id="{CFF60EEC-F7F5-413C-9BE5-E7603C4A3AD3}"/>
               </a:ext>
             </a:extLst>
           </p:cNvPr>
@@ -2922,7 +2922,7 @@
           <p:cNvPr id="11" name="">
             <a:extLst xmlns:a="http://schemas.openxmlformats.org/drawingml/2006/main">
               <a:ext uri="{FF2B5EF4-FFF2-40B4-BE49-F238E27FC236}">
-                <a16:creationId xmlns:a16="http://schemas.microsoft.com/office/drawing/2014/main" id="{5952186B-89A6-4C22-93ED-5DE1B835A1D0}"/>
+                <a16:creationId xmlns:a16="http://schemas.microsoft.com/office/drawing/2014/main" id="{1E10A2FF-3B3E-44D8-80BE-E34FAB77FF50}"/>
               </a:ext>
             </a:extLst>
           </p:cNvPr>
@@ -2979,7 +2979,7 @@
           <p:cNvPr id="12" name="">
             <a:extLst xmlns:a="http://schemas.openxmlformats.org/drawingml/2006/main">
               <a:ext uri="{FF2B5EF4-FFF2-40B4-BE49-F238E27FC236}">
-                <a16:creationId xmlns:a16="http://schemas.microsoft.com/office/drawing/2014/main" id="{25DF70C4-F1DE-4FA2-A124-7A97A744D23B}"/>
+                <a16:creationId xmlns:a16="http://schemas.microsoft.com/office/drawing/2014/main" id="{31E9A18D-0124-4CA5-88D0-4581380B6C91}"/>
               </a:ext>
             </a:extLst>
           </p:cNvPr>
@@ -3036,7 +3036,7 @@
           <p:cNvPr id="13" name="">
             <a:extLst xmlns:a="http://schemas.openxmlformats.org/drawingml/2006/main">
               <a:ext uri="{FF2B5EF4-FFF2-40B4-BE49-F238E27FC236}">
-                <a16:creationId xmlns:a16="http://schemas.microsoft.com/office/drawing/2014/main" id="{9B33E336-747A-4758-900D-65181B1F3627}"/>
+                <a16:creationId xmlns:a16="http://schemas.microsoft.com/office/drawing/2014/main" id="{E59587D8-E365-4365-9185-07E063CFF2AF}"/>
               </a:ext>
             </a:extLst>
           </p:cNvPr>
@@ -3091,7 +3091,7 @@
     </p:spTree>
     <p:extLst>
       <p:ext uri="{BB962C8B-B14F-4D97-AF65-F5344CB8AC3E}">
-        <p14:creationId xmlns:p14="http://schemas.microsoft.com/office/powerpoint/2010/main" val="1424613774"/>
+        <p14:creationId xmlns:p14="http://schemas.microsoft.com/office/powerpoint/2010/main" val="304522310"/>
       </p:ext>
     </p:extLst>
   </p:cSld>
@@ -3292,7 +3292,7 @@
           <p:cNvPr id="19" name="">
             <a:extLst xmlns:a="http://schemas.openxmlformats.org/drawingml/2006/main">
               <a:ext uri="{FF2B5EF4-FFF2-40B4-BE49-F238E27FC236}">
-                <a16:creationId xmlns:a16="http://schemas.microsoft.com/office/drawing/2014/main" id="{1094E050-F42B-4959-8E96-D76C90760B33}"/>
+                <a16:creationId xmlns:a16="http://schemas.microsoft.com/office/drawing/2014/main" id="{AC9E5AE6-EF47-4954-8F77-2D7331844506}"/>
               </a:ext>
             </a:extLst>
           </p:cNvPr>
@@ -3324,7 +3324,7 @@
           <p:cNvPr id="2" name="">
             <a:extLst xmlns:a="http://schemas.openxmlformats.org/drawingml/2006/main">
               <a:ext uri="{FF2B5EF4-FFF2-40B4-BE49-F238E27FC236}">
-                <a16:creationId xmlns:a16="http://schemas.microsoft.com/office/drawing/2014/main" id="{8DD7317B-49EF-4CCD-A97C-F09DEE47E385}"/>
+                <a16:creationId xmlns:a16="http://schemas.microsoft.com/office/drawing/2014/main" id="{C195F627-AA65-448C-B0E8-57D39C40A415}"/>
               </a:ext>
             </a:extLst>
           </p:cNvPr>
@@ -3381,7 +3381,7 @@
           <p:cNvPr id="3" name="">
             <a:extLst xmlns:a="http://schemas.openxmlformats.org/drawingml/2006/main">
               <a:ext uri="{FF2B5EF4-FFF2-40B4-BE49-F238E27FC236}">
-                <a16:creationId xmlns:a16="http://schemas.microsoft.com/office/drawing/2014/main" id="{D9109F90-058D-44BC-9375-C16895C9CB2B}"/>
+                <a16:creationId xmlns:a16="http://schemas.microsoft.com/office/drawing/2014/main" id="{8343AF73-49BC-45BB-BC09-6B8EB4620692}"/>
               </a:ext>
             </a:extLst>
           </p:cNvPr>
@@ -3413,7 +3413,7 @@
           <p:cNvPr id="4" name="">
             <a:extLst xmlns:a="http://schemas.openxmlformats.org/drawingml/2006/main">
               <a:ext uri="{FF2B5EF4-FFF2-40B4-BE49-F238E27FC236}">
-                <a16:creationId xmlns:a16="http://schemas.microsoft.com/office/drawing/2014/main" id="{3ACF92A5-DD28-41CD-B3D5-D04F1757D25C}"/>
+                <a16:creationId xmlns:a16="http://schemas.microsoft.com/office/drawing/2014/main" id="{61DC75DC-C64A-447D-8BD4-D92A3C32AE4B}"/>
               </a:ext>
             </a:extLst>
           </p:cNvPr>
@@ -3470,7 +3470,7 @@
           <p:cNvPr id="5" name="">
             <a:extLst xmlns:a="http://schemas.openxmlformats.org/drawingml/2006/main">
               <a:ext uri="{FF2B5EF4-FFF2-40B4-BE49-F238E27FC236}">
-                <a16:creationId xmlns:a16="http://schemas.microsoft.com/office/drawing/2014/main" id="{11E10AD4-34F1-4EBF-9074-3104181C2504}"/>
+                <a16:creationId xmlns:a16="http://schemas.microsoft.com/office/drawing/2014/main" id="{38EFEAF8-E19D-439A-9B63-28D145BFC1D3}"/>
               </a:ext>
             </a:extLst>
           </p:cNvPr>
@@ -3527,7 +3527,7 @@
           <p:cNvPr id="6" name="">
             <a:extLst xmlns:a="http://schemas.openxmlformats.org/drawingml/2006/main">
               <a:ext uri="{FF2B5EF4-FFF2-40B4-BE49-F238E27FC236}">
-                <a16:creationId xmlns:a16="http://schemas.microsoft.com/office/drawing/2014/main" id="{C04B7615-86E1-484E-8C0E-7E394233A7BF}"/>
+                <a16:creationId xmlns:a16="http://schemas.microsoft.com/office/drawing/2014/main" id="{345FDC6E-4EE2-4090-BE5B-061696CABE99}"/>
               </a:ext>
             </a:extLst>
           </p:cNvPr>
@@ -3584,7 +3584,7 @@
           <p:cNvPr id="7" name="">
             <a:extLst xmlns:a="http://schemas.openxmlformats.org/drawingml/2006/main">
               <a:ext uri="{FF2B5EF4-FFF2-40B4-BE49-F238E27FC236}">
-                <a16:creationId xmlns:a16="http://schemas.microsoft.com/office/drawing/2014/main" id="{CFB8F04E-47E7-449A-89E5-D41D53F746B8}"/>
+                <a16:creationId xmlns:a16="http://schemas.microsoft.com/office/drawing/2014/main" id="{0EA9A03E-288E-4749-964C-74B769887820}"/>
               </a:ext>
             </a:extLst>
           </p:cNvPr>
@@ -3616,7 +3616,7 @@
           <p:cNvPr id="8" name="">
             <a:extLst xmlns:a="http://schemas.openxmlformats.org/drawingml/2006/main">
               <a:ext uri="{FF2B5EF4-FFF2-40B4-BE49-F238E27FC236}">
-                <a16:creationId xmlns:a16="http://schemas.microsoft.com/office/drawing/2014/main" id="{F3DF47C0-FA7A-462C-BFE7-1713F5249D06}"/>
+                <a16:creationId xmlns:a16="http://schemas.microsoft.com/office/drawing/2014/main" id="{7BB2D557-B707-4C01-91A4-0BBDB722CB00}"/>
               </a:ext>
             </a:extLst>
           </p:cNvPr>
@@ -3673,7 +3673,7 @@
           <p:cNvPr id="9" name="">
             <a:extLst xmlns:a="http://schemas.openxmlformats.org/drawingml/2006/main">
               <a:ext uri="{FF2B5EF4-FFF2-40B4-BE49-F238E27FC236}">
-                <a16:creationId xmlns:a16="http://schemas.microsoft.com/office/drawing/2014/main" id="{C12F9154-57B8-41AB-B7D5-273E59A2C329}"/>
+                <a16:creationId xmlns:a16="http://schemas.microsoft.com/office/drawing/2014/main" id="{B3A95487-8462-4121-8CF4-F0811A3FE00D}"/>
               </a:ext>
             </a:extLst>
           </p:cNvPr>
@@ -3730,7 +3730,7 @@
           <p:cNvPr id="10" name="">
             <a:extLst xmlns:a="http://schemas.openxmlformats.org/drawingml/2006/main">
               <a:ext uri="{FF2B5EF4-FFF2-40B4-BE49-F238E27FC236}">
-                <a16:creationId xmlns:a16="http://schemas.microsoft.com/office/drawing/2014/main" id="{01A6DE38-0966-453A-9526-28288E58BD10}"/>
+                <a16:creationId xmlns:a16="http://schemas.microsoft.com/office/drawing/2014/main" id="{F444F02E-3FDF-4A4A-AE44-645188082544}"/>
               </a:ext>
             </a:extLst>
           </p:cNvPr>
@@ -3787,7 +3787,7 @@
           <p:cNvPr id="11" name="">
             <a:extLst xmlns:a="http://schemas.openxmlformats.org/drawingml/2006/main">
               <a:ext uri="{FF2B5EF4-FFF2-40B4-BE49-F238E27FC236}">
-                <a16:creationId xmlns:a16="http://schemas.microsoft.com/office/drawing/2014/main" id="{18835F98-6EC5-46D6-BF91-027E1BE80BD8}"/>
+                <a16:creationId xmlns:a16="http://schemas.microsoft.com/office/drawing/2014/main" id="{3288E573-C00F-49E0-A092-B624E9CB12AA}"/>
               </a:ext>
             </a:extLst>
           </p:cNvPr>
@@ -3821,7 +3821,7 @@
           <p:cNvPr id="12" name="">
             <a:extLst xmlns:a="http://schemas.openxmlformats.org/drawingml/2006/main">
               <a:ext uri="{FF2B5EF4-FFF2-40B4-BE49-F238E27FC236}">
-                <a16:creationId xmlns:a16="http://schemas.microsoft.com/office/drawing/2014/main" id="{F7C3C1B4-D602-4B41-82A5-750EBC0CF6AF}"/>
+                <a16:creationId xmlns:a16="http://schemas.microsoft.com/office/drawing/2014/main" id="{B8FEA3FD-98F0-4BF8-9E9A-C19387F85CEA}"/>
               </a:ext>
             </a:extLst>
           </p:cNvPr>
@@ -3878,7 +3878,7 @@
           <p:cNvPr id="13" name="">
             <a:extLst xmlns:a="http://schemas.openxmlformats.org/drawingml/2006/main">
               <a:ext uri="{FF2B5EF4-FFF2-40B4-BE49-F238E27FC236}">
-                <a16:creationId xmlns:a16="http://schemas.microsoft.com/office/drawing/2014/main" id="{9050DC33-334B-4008-A19A-5CDA75325BB4}"/>
+                <a16:creationId xmlns:a16="http://schemas.microsoft.com/office/drawing/2014/main" id="{230B5559-6E3A-4D70-9B8C-B307AC69B6C5}"/>
               </a:ext>
             </a:extLst>
           </p:cNvPr>
@@ -3935,7 +3935,7 @@
           <p:cNvPr id="14" name="">
             <a:extLst xmlns:a="http://schemas.openxmlformats.org/drawingml/2006/main">
               <a:ext uri="{FF2B5EF4-FFF2-40B4-BE49-F238E27FC236}">
-                <a16:creationId xmlns:a16="http://schemas.microsoft.com/office/drawing/2014/main" id="{B76DD15F-1100-42C5-9E48-94ACC8D774B3}"/>
+                <a16:creationId xmlns:a16="http://schemas.microsoft.com/office/drawing/2014/main" id="{F2A0085D-8496-4BA2-B734-DFB8E24205CC}"/>
               </a:ext>
             </a:extLst>
           </p:cNvPr>
@@ -3992,7 +3992,7 @@
           <p:cNvPr id="15" name="">
             <a:extLst xmlns:a="http://schemas.openxmlformats.org/drawingml/2006/main">
               <a:ext uri="{FF2B5EF4-FFF2-40B4-BE49-F238E27FC236}">
-                <a16:creationId xmlns:a16="http://schemas.microsoft.com/office/drawing/2014/main" id="{4766AE88-7011-41E4-96E4-F4581B062879}"/>
+                <a16:creationId xmlns:a16="http://schemas.microsoft.com/office/drawing/2014/main" id="{5E880B42-AE45-47EA-831E-7BCC4FCD9844}"/>
               </a:ext>
             </a:extLst>
           </p:cNvPr>
@@ -4026,7 +4026,7 @@
           <p:cNvPr id="16" name="">
             <a:extLst xmlns:a="http://schemas.openxmlformats.org/drawingml/2006/main">
               <a:ext uri="{FF2B5EF4-FFF2-40B4-BE49-F238E27FC236}">
-                <a16:creationId xmlns:a16="http://schemas.microsoft.com/office/drawing/2014/main" id="{40D150E3-6394-499B-8E29-1DE42F9FF037}"/>
+                <a16:creationId xmlns:a16="http://schemas.microsoft.com/office/drawing/2014/main" id="{E5329BAC-1EBE-48ED-8D5F-1FDA76CC0C77}"/>
               </a:ext>
             </a:extLst>
           </p:cNvPr>
@@ -4083,7 +4083,7 @@
           <p:cNvPr id="17" name="">
             <a:extLst xmlns:a="http://schemas.openxmlformats.org/drawingml/2006/main">
               <a:ext uri="{FF2B5EF4-FFF2-40B4-BE49-F238E27FC236}">
-                <a16:creationId xmlns:a16="http://schemas.microsoft.com/office/drawing/2014/main" id="{BD98B06B-90D1-4EEC-A031-4BB9A77E009E}"/>
+                <a16:creationId xmlns:a16="http://schemas.microsoft.com/office/drawing/2014/main" id="{AAA8322A-116F-4300-8210-4E622822B85D}"/>
               </a:ext>
             </a:extLst>
           </p:cNvPr>
@@ -4140,7 +4140,7 @@
           <p:cNvPr id="18" name="">
             <a:extLst xmlns:a="http://schemas.openxmlformats.org/drawingml/2006/main">
               <a:ext uri="{FF2B5EF4-FFF2-40B4-BE49-F238E27FC236}">
-                <a16:creationId xmlns:a16="http://schemas.microsoft.com/office/drawing/2014/main" id="{E2EBF84B-2588-4A44-A438-5F3F98903A74}"/>
+                <a16:creationId xmlns:a16="http://schemas.microsoft.com/office/drawing/2014/main" id="{72E3C8D4-46FD-4B0A-8BDD-9C5F32569D24}"/>
               </a:ext>
             </a:extLst>
           </p:cNvPr>
@@ -4195,7 +4195,7 @@
     </p:spTree>
     <p:extLst>
       <p:ext uri="{BB962C8B-B14F-4D97-AF65-F5344CB8AC3E}">
-        <p14:creationId xmlns:p14="http://schemas.microsoft.com/office/powerpoint/2010/main" val="1304488485"/>
+        <p14:creationId xmlns:p14="http://schemas.microsoft.com/office/powerpoint/2010/main" val="2037962993"/>
       </p:ext>
     </p:extLst>
   </p:cSld>
@@ -4350,7 +4350,7 @@
           <p:cNvPr id="23" name="">
             <a:extLst xmlns:a="http://schemas.openxmlformats.org/drawingml/2006/main">
               <a:ext uri="{FF2B5EF4-FFF2-40B4-BE49-F238E27FC236}">
-                <a16:creationId xmlns:a16="http://schemas.microsoft.com/office/drawing/2014/main" id="{1F607E76-08D8-4607-8922-431DAEF9476F}"/>
+                <a16:creationId xmlns:a16="http://schemas.microsoft.com/office/drawing/2014/main" id="{813148A4-CE69-4C56-B184-0F916E3B8028}"/>
               </a:ext>
             </a:extLst>
           </p:cNvPr>
@@ -4382,7 +4382,7 @@
           <p:cNvPr id="2" name="">
             <a:extLst xmlns:a="http://schemas.openxmlformats.org/drawingml/2006/main">
               <a:ext uri="{FF2B5EF4-FFF2-40B4-BE49-F238E27FC236}">
-                <a16:creationId xmlns:a16="http://schemas.microsoft.com/office/drawing/2014/main" id="{B4CDD356-594A-4B2D-A9AA-5E9A24C29366}"/>
+                <a16:creationId xmlns:a16="http://schemas.microsoft.com/office/drawing/2014/main" id="{C8FAB2BD-62E4-4BEF-BE03-E0989F62005A}"/>
               </a:ext>
             </a:extLst>
           </p:cNvPr>
@@ -4439,7 +4439,7 @@
           <p:cNvPr id="3" name="">
             <a:extLst xmlns:a="http://schemas.openxmlformats.org/drawingml/2006/main">
               <a:ext uri="{FF2B5EF4-FFF2-40B4-BE49-F238E27FC236}">
-                <a16:creationId xmlns:a16="http://schemas.microsoft.com/office/drawing/2014/main" id="{A78E3105-A0BF-494A-AD41-97ED10AE37C2}"/>
+                <a16:creationId xmlns:a16="http://schemas.microsoft.com/office/drawing/2014/main" id="{A1ADDC89-D23E-473C-9F1B-738120EB2110}"/>
               </a:ext>
             </a:extLst>
           </p:cNvPr>
@@ -4471,7 +4471,7 @@
           <p:cNvPr id="4" name="">
             <a:extLst xmlns:a="http://schemas.openxmlformats.org/drawingml/2006/main">
               <a:ext uri="{FF2B5EF4-FFF2-40B4-BE49-F238E27FC236}">
-                <a16:creationId xmlns:a16="http://schemas.microsoft.com/office/drawing/2014/main" id="{0B0280AD-484D-4929-B9A5-9E71B127C61B}"/>
+                <a16:creationId xmlns:a16="http://schemas.microsoft.com/office/drawing/2014/main" id="{24527F45-5F69-4C17-906F-2AD35198900B}"/>
               </a:ext>
             </a:extLst>
           </p:cNvPr>
@@ -4528,7 +4528,7 @@
           <p:cNvPr id="5" name="">
             <a:extLst xmlns:a="http://schemas.openxmlformats.org/drawingml/2006/main">
               <a:ext uri="{FF2B5EF4-FFF2-40B4-BE49-F238E27FC236}">
-                <a16:creationId xmlns:a16="http://schemas.microsoft.com/office/drawing/2014/main" id="{3A8B715A-EE10-4D51-BC21-1CCA1D44C2A2}"/>
+                <a16:creationId xmlns:a16="http://schemas.microsoft.com/office/drawing/2014/main" id="{E73895A8-D0ED-4348-BF92-4B6BC6AB4DBF}"/>
               </a:ext>
             </a:extLst>
           </p:cNvPr>
@@ -4585,7 +4585,7 @@
           <p:cNvPr id="6" name="">
             <a:extLst xmlns:a="http://schemas.openxmlformats.org/drawingml/2006/main">
               <a:ext uri="{FF2B5EF4-FFF2-40B4-BE49-F238E27FC236}">
-                <a16:creationId xmlns:a16="http://schemas.microsoft.com/office/drawing/2014/main" id="{C5CB86C5-D164-4BD0-8545-9766C682FDF7}"/>
+                <a16:creationId xmlns:a16="http://schemas.microsoft.com/office/drawing/2014/main" id="{3ACCC370-E33F-4BA5-B4BB-0A88EACDCD3E}"/>
               </a:ext>
             </a:extLst>
           </p:cNvPr>
@@ -4642,7 +4642,7 @@
           <p:cNvPr id="7" name="">
             <a:extLst xmlns:a="http://schemas.openxmlformats.org/drawingml/2006/main">
               <a:ext uri="{FF2B5EF4-FFF2-40B4-BE49-F238E27FC236}">
-                <a16:creationId xmlns:a16="http://schemas.microsoft.com/office/drawing/2014/main" id="{2A162DD3-35EA-4D6B-B8E2-84F0F341DEA2}"/>
+                <a16:creationId xmlns:a16="http://schemas.microsoft.com/office/drawing/2014/main" id="{89627F11-C702-4BA2-87C2-0E72398BBCFF}"/>
               </a:ext>
             </a:extLst>
           </p:cNvPr>
@@ -4674,7 +4674,7 @@
           <p:cNvPr id="8" name="">
             <a:extLst xmlns:a="http://schemas.openxmlformats.org/drawingml/2006/main">
               <a:ext uri="{FF2B5EF4-FFF2-40B4-BE49-F238E27FC236}">
-                <a16:creationId xmlns:a16="http://schemas.microsoft.com/office/drawing/2014/main" id="{EA9DCB16-8C06-49C4-9200-6A21299C3D73}"/>
+                <a16:creationId xmlns:a16="http://schemas.microsoft.com/office/drawing/2014/main" id="{E69A0BBC-EBA0-4E7F-9CD6-2CC18359DBB0}"/>
               </a:ext>
             </a:extLst>
           </p:cNvPr>
@@ -4731,7 +4731,7 @@
           <p:cNvPr id="9" name="">
             <a:extLst xmlns:a="http://schemas.openxmlformats.org/drawingml/2006/main">
               <a:ext uri="{FF2B5EF4-FFF2-40B4-BE49-F238E27FC236}">
-                <a16:creationId xmlns:a16="http://schemas.microsoft.com/office/drawing/2014/main" id="{6DAD138B-47A9-4054-A7A3-9A9CCAF09FC5}"/>
+                <a16:creationId xmlns:a16="http://schemas.microsoft.com/office/drawing/2014/main" id="{71B85999-62BD-499E-A1B6-649EFAD2EA21}"/>
               </a:ext>
             </a:extLst>
           </p:cNvPr>
@@ -4788,7 +4788,7 @@
           <p:cNvPr id="10" name="">
             <a:extLst xmlns:a="http://schemas.openxmlformats.org/drawingml/2006/main">
               <a:ext uri="{FF2B5EF4-FFF2-40B4-BE49-F238E27FC236}">
-                <a16:creationId xmlns:a16="http://schemas.microsoft.com/office/drawing/2014/main" id="{0F6A4F62-4E0D-42E4-98CB-C9C8462A7586}"/>
+                <a16:creationId xmlns:a16="http://schemas.microsoft.com/office/drawing/2014/main" id="{2E3A2725-AF7D-4CFF-B86B-E0D6E3D879BC}"/>
               </a:ext>
             </a:extLst>
           </p:cNvPr>
@@ -4822,7 +4822,7 @@
           <p:cNvPr id="11" name="">
             <a:extLst xmlns:a="http://schemas.openxmlformats.org/drawingml/2006/main">
               <a:ext uri="{FF2B5EF4-FFF2-40B4-BE49-F238E27FC236}">
-                <a16:creationId xmlns:a16="http://schemas.microsoft.com/office/drawing/2014/main" id="{8FDBE765-4A15-4F82-8FEC-5FF9D1B043DD}"/>
+                <a16:creationId xmlns:a16="http://schemas.microsoft.com/office/drawing/2014/main" id="{7FAD6CD1-585B-4BB1-90A1-627A8E687B8D}"/>
               </a:ext>
             </a:extLst>
           </p:cNvPr>
@@ -4854,7 +4854,7 @@
           <p:cNvPr id="12" name="">
             <a:extLst xmlns:a="http://schemas.openxmlformats.org/drawingml/2006/main">
               <a:ext uri="{FF2B5EF4-FFF2-40B4-BE49-F238E27FC236}">
-                <a16:creationId xmlns:a16="http://schemas.microsoft.com/office/drawing/2014/main" id="{AD26C9A3-5693-4DEE-B23F-E828CFB085A0}"/>
+                <a16:creationId xmlns:a16="http://schemas.microsoft.com/office/drawing/2014/main" id="{BBE80677-2754-4BAB-9B6E-B84744E7A177}"/>
               </a:ext>
             </a:extLst>
           </p:cNvPr>
@@ -4911,7 +4911,7 @@
           <p:cNvPr id="13" name="">
             <a:extLst xmlns:a="http://schemas.openxmlformats.org/drawingml/2006/main">
               <a:ext uri="{FF2B5EF4-FFF2-40B4-BE49-F238E27FC236}">
-                <a16:creationId xmlns:a16="http://schemas.microsoft.com/office/drawing/2014/main" id="{C5439A5E-2D49-4A40-8BC8-3BCAAA753233}"/>
+                <a16:creationId xmlns:a16="http://schemas.microsoft.com/office/drawing/2014/main" id="{6B6C5240-FAA7-40DD-BE85-C60BE6C8C238}"/>
               </a:ext>
             </a:extLst>
           </p:cNvPr>
@@ -4968,7 +4968,7 @@
           <p:cNvPr id="14" name="">
             <a:extLst xmlns:a="http://schemas.openxmlformats.org/drawingml/2006/main">
               <a:ext uri="{FF2B5EF4-FFF2-40B4-BE49-F238E27FC236}">
-                <a16:creationId xmlns:a16="http://schemas.microsoft.com/office/drawing/2014/main" id="{F341D6DC-6474-4071-ACC2-445AF1736FD1}"/>
+                <a16:creationId xmlns:a16="http://schemas.microsoft.com/office/drawing/2014/main" id="{EDBE0C5B-5574-49D0-B93E-4C5A973FD765}"/>
               </a:ext>
             </a:extLst>
           </p:cNvPr>
@@ -5002,7 +5002,7 @@
           <p:cNvPr id="15" name="">
             <a:extLst xmlns:a="http://schemas.openxmlformats.org/drawingml/2006/main">
               <a:ext uri="{FF2B5EF4-FFF2-40B4-BE49-F238E27FC236}">
-                <a16:creationId xmlns:a16="http://schemas.microsoft.com/office/drawing/2014/main" id="{34D722EC-DE46-4426-BB3C-3D28BBC5D0D7}"/>
+                <a16:creationId xmlns:a16="http://schemas.microsoft.com/office/drawing/2014/main" id="{5A13B520-ABF6-4B60-918C-5815E7AC7CF7}"/>
               </a:ext>
             </a:extLst>
           </p:cNvPr>
@@ -5034,7 +5034,7 @@
           <p:cNvPr id="16" name="">
             <a:extLst xmlns:a="http://schemas.openxmlformats.org/drawingml/2006/main">
               <a:ext uri="{FF2B5EF4-FFF2-40B4-BE49-F238E27FC236}">
-                <a16:creationId xmlns:a16="http://schemas.microsoft.com/office/drawing/2014/main" id="{CDC4016D-55C6-4456-9E18-3A1A0697F40F}"/>
+                <a16:creationId xmlns:a16="http://schemas.microsoft.com/office/drawing/2014/main" id="{628EF8DC-DEBE-4FDD-BF95-364E52CE1861}"/>
               </a:ext>
             </a:extLst>
           </p:cNvPr>
@@ -5091,7 +5091,7 @@
           <p:cNvPr id="17" name="">
             <a:extLst xmlns:a="http://schemas.openxmlformats.org/drawingml/2006/main">
               <a:ext uri="{FF2B5EF4-FFF2-40B4-BE49-F238E27FC236}">
-                <a16:creationId xmlns:a16="http://schemas.microsoft.com/office/drawing/2014/main" id="{D3D2971B-7A57-410B-8207-DDB058854F6D}"/>
+                <a16:creationId xmlns:a16="http://schemas.microsoft.com/office/drawing/2014/main" id="{C2C4F6CE-008E-4ABE-9E0D-FCD248BB0990}"/>
               </a:ext>
             </a:extLst>
           </p:cNvPr>
@@ -5148,7 +5148,7 @@
           <p:cNvPr id="18" name="">
             <a:extLst xmlns:a="http://schemas.openxmlformats.org/drawingml/2006/main">
               <a:ext uri="{FF2B5EF4-FFF2-40B4-BE49-F238E27FC236}">
-                <a16:creationId xmlns:a16="http://schemas.microsoft.com/office/drawing/2014/main" id="{5B614F71-DEEF-4B27-8008-4BFD74531FD5}"/>
+                <a16:creationId xmlns:a16="http://schemas.microsoft.com/office/drawing/2014/main" id="{BAD940AB-1093-41E0-BADF-144F8871326C}"/>
               </a:ext>
             </a:extLst>
           </p:cNvPr>
@@ -5182,7 +5182,7 @@
           <p:cNvPr id="19" name="">
             <a:extLst xmlns:a="http://schemas.openxmlformats.org/drawingml/2006/main">
               <a:ext uri="{FF2B5EF4-FFF2-40B4-BE49-F238E27FC236}">
-                <a16:creationId xmlns:a16="http://schemas.microsoft.com/office/drawing/2014/main" id="{935CB587-753C-4CC6-93FD-D844D21E8249}"/>
+                <a16:creationId xmlns:a16="http://schemas.microsoft.com/office/drawing/2014/main" id="{F7CF2B97-93D8-42CE-A97C-4E09CAB572BB}"/>
               </a:ext>
             </a:extLst>
           </p:cNvPr>
@@ -5214,7 +5214,7 @@
           <p:cNvPr id="20" name="">
             <a:extLst xmlns:a="http://schemas.openxmlformats.org/drawingml/2006/main">
               <a:ext uri="{FF2B5EF4-FFF2-40B4-BE49-F238E27FC236}">
-                <a16:creationId xmlns:a16="http://schemas.microsoft.com/office/drawing/2014/main" id="{F9B5068B-D71D-4B19-B479-28ECE91ED444}"/>
+                <a16:creationId xmlns:a16="http://schemas.microsoft.com/office/drawing/2014/main" id="{FBFCF96D-8C6B-4724-8988-40400941CD41}"/>
               </a:ext>
             </a:extLst>
           </p:cNvPr>
@@ -5271,7 +5271,7 @@
           <p:cNvPr id="21" name="">
             <a:extLst xmlns:a="http://schemas.openxmlformats.org/drawingml/2006/main">
               <a:ext uri="{FF2B5EF4-FFF2-40B4-BE49-F238E27FC236}">
-                <a16:creationId xmlns:a16="http://schemas.microsoft.com/office/drawing/2014/main" id="{89E270D3-CAB2-4179-9966-A5EF5C83F23F}"/>
+                <a16:creationId xmlns:a16="http://schemas.microsoft.com/office/drawing/2014/main" id="{FD3D311F-DC19-47DF-AC1C-68037ABAA270}"/>
               </a:ext>
             </a:extLst>
           </p:cNvPr>
@@ -5328,7 +5328,7 @@
           <p:cNvPr id="22" name="">
             <a:extLst xmlns:a="http://schemas.openxmlformats.org/drawingml/2006/main">
               <a:ext uri="{FF2B5EF4-FFF2-40B4-BE49-F238E27FC236}">
-                <a16:creationId xmlns:a16="http://schemas.microsoft.com/office/drawing/2014/main" id="{9B9A2AC8-E8EA-45F5-A0D8-A4241C4ED7D8}"/>
+                <a16:creationId xmlns:a16="http://schemas.microsoft.com/office/drawing/2014/main" id="{9BD65320-6AE4-4D3E-A4DD-2978B6A2ABC2}"/>
               </a:ext>
             </a:extLst>
           </p:cNvPr>
@@ -5383,7 +5383,7 @@
     </p:spTree>
     <p:extLst>
       <p:ext uri="{BB962C8B-B14F-4D97-AF65-F5344CB8AC3E}">
-        <p14:creationId xmlns:p14="http://schemas.microsoft.com/office/powerpoint/2010/main" val="352039451"/>
+        <p14:creationId xmlns:p14="http://schemas.microsoft.com/office/powerpoint/2010/main" val="953975206"/>
       </p:ext>
     </p:extLst>
   </p:cSld>
@@ -5584,7 +5584,7 @@
           <p:cNvPr id="23" name="">
             <a:extLst xmlns:a="http://schemas.openxmlformats.org/drawingml/2006/main">
               <a:ext uri="{FF2B5EF4-FFF2-40B4-BE49-F238E27FC236}">
-                <a16:creationId xmlns:a16="http://schemas.microsoft.com/office/drawing/2014/main" id="{0C797412-E5CB-4C5F-AB0A-5542325C4E12}"/>
+                <a16:creationId xmlns:a16="http://schemas.microsoft.com/office/drawing/2014/main" id="{C5BF2FE7-51C2-442D-8ABE-E6D71CC89356}"/>
               </a:ext>
             </a:extLst>
           </p:cNvPr>
@@ -5616,7 +5616,7 @@
           <p:cNvPr id="2" name="">
             <a:extLst xmlns:a="http://schemas.openxmlformats.org/drawingml/2006/main">
               <a:ext uri="{FF2B5EF4-FFF2-40B4-BE49-F238E27FC236}">
-                <a16:creationId xmlns:a16="http://schemas.microsoft.com/office/drawing/2014/main" id="{363B562C-BA1A-41F9-AF4E-A50D0A7A0C85}"/>
+                <a16:creationId xmlns:a16="http://schemas.microsoft.com/office/drawing/2014/main" id="{179F539A-10DE-4333-8B3E-893F20D1A80C}"/>
               </a:ext>
             </a:extLst>
           </p:cNvPr>
@@ -5673,7 +5673,7 @@
           <p:cNvPr id="3" name="">
             <a:extLst xmlns:a="http://schemas.openxmlformats.org/drawingml/2006/main">
               <a:ext uri="{FF2B5EF4-FFF2-40B4-BE49-F238E27FC236}">
-                <a16:creationId xmlns:a16="http://schemas.microsoft.com/office/drawing/2014/main" id="{015AF5FD-D45E-4E4D-9140-D1B6B820141B}"/>
+                <a16:creationId xmlns:a16="http://schemas.microsoft.com/office/drawing/2014/main" id="{FB9E4281-9D0C-4F22-B3D2-00341C4F48FE}"/>
               </a:ext>
             </a:extLst>
           </p:cNvPr>
@@ -5705,7 +5705,7 @@
           <p:cNvPr id="4" name="">
             <a:extLst xmlns:a="http://schemas.openxmlformats.org/drawingml/2006/main">
               <a:ext uri="{FF2B5EF4-FFF2-40B4-BE49-F238E27FC236}">
-                <a16:creationId xmlns:a16="http://schemas.microsoft.com/office/drawing/2014/main" id="{E278F6BD-C6DA-418F-87BD-748C44AF1181}"/>
+                <a16:creationId xmlns:a16="http://schemas.microsoft.com/office/drawing/2014/main" id="{BDABD530-E00F-40E1-AAC3-F26CFE5006C5}"/>
               </a:ext>
             </a:extLst>
           </p:cNvPr>
@@ -5762,7 +5762,7 @@
           <p:cNvPr id="5" name="">
             <a:extLst xmlns:a="http://schemas.openxmlformats.org/drawingml/2006/main">
               <a:ext uri="{FF2B5EF4-FFF2-40B4-BE49-F238E27FC236}">
-                <a16:creationId xmlns:a16="http://schemas.microsoft.com/office/drawing/2014/main" id="{6980F242-A1A4-4440-9210-6A0541FA3606}"/>
+                <a16:creationId xmlns:a16="http://schemas.microsoft.com/office/drawing/2014/main" id="{E2327FC3-FBA1-4EA4-8614-771138E3A18E}"/>
               </a:ext>
             </a:extLst>
           </p:cNvPr>
@@ -5819,7 +5819,7 @@
           <p:cNvPr id="6" name="">
             <a:extLst xmlns:a="http://schemas.openxmlformats.org/drawingml/2006/main">
               <a:ext uri="{FF2B5EF4-FFF2-40B4-BE49-F238E27FC236}">
-                <a16:creationId xmlns:a16="http://schemas.microsoft.com/office/drawing/2014/main" id="{965CC748-56D4-4042-B31A-BF07FD833BB0}"/>
+                <a16:creationId xmlns:a16="http://schemas.microsoft.com/office/drawing/2014/main" id="{ED1375D8-683C-41CB-AD88-D31AB86A0C45}"/>
               </a:ext>
             </a:extLst>
           </p:cNvPr>
@@ -5876,7 +5876,7 @@
           <p:cNvPr id="7" name="">
             <a:extLst xmlns:a="http://schemas.openxmlformats.org/drawingml/2006/main">
               <a:ext uri="{FF2B5EF4-FFF2-40B4-BE49-F238E27FC236}">
-                <a16:creationId xmlns:a16="http://schemas.microsoft.com/office/drawing/2014/main" id="{4B3679C7-83D9-4AAD-8508-BB8A690BFD32}"/>
+                <a16:creationId xmlns:a16="http://schemas.microsoft.com/office/drawing/2014/main" id="{1CFEA72B-27A8-46FA-8EEC-473229206608}"/>
               </a:ext>
             </a:extLst>
           </p:cNvPr>
@@ -5908,7 +5908,7 @@
           <p:cNvPr id="8" name="">
             <a:extLst xmlns:a="http://schemas.openxmlformats.org/drawingml/2006/main">
               <a:ext uri="{FF2B5EF4-FFF2-40B4-BE49-F238E27FC236}">
-                <a16:creationId xmlns:a16="http://schemas.microsoft.com/office/drawing/2014/main" id="{275EE049-E728-4B52-BA97-39596F1DEB2C}"/>
+                <a16:creationId xmlns:a16="http://schemas.microsoft.com/office/drawing/2014/main" id="{FC8A5D6D-4716-4345-8EDB-D68306993388}"/>
               </a:ext>
             </a:extLst>
           </p:cNvPr>
@@ -5965,7 +5965,7 @@
           <p:cNvPr id="9" name="">
             <a:extLst xmlns:a="http://schemas.openxmlformats.org/drawingml/2006/main">
               <a:ext uri="{FF2B5EF4-FFF2-40B4-BE49-F238E27FC236}">
-                <a16:creationId xmlns:a16="http://schemas.microsoft.com/office/drawing/2014/main" id="{B384CC97-0BEE-4A39-A8FE-2F728D5897C1}"/>
+                <a16:creationId xmlns:a16="http://schemas.microsoft.com/office/drawing/2014/main" id="{DC459952-1C08-4FBF-8C59-68C3F7DC2EB7}"/>
               </a:ext>
             </a:extLst>
           </p:cNvPr>
@@ -6022,7 +6022,7 @@
           <p:cNvPr id="10" name="">
             <a:extLst xmlns:a="http://schemas.openxmlformats.org/drawingml/2006/main">
               <a:ext uri="{FF2B5EF4-FFF2-40B4-BE49-F238E27FC236}">
-                <a16:creationId xmlns:a16="http://schemas.microsoft.com/office/drawing/2014/main" id="{8E3769ED-6CAD-4392-93B5-86AB74A95CE3}"/>
+                <a16:creationId xmlns:a16="http://schemas.microsoft.com/office/drawing/2014/main" id="{A27A80A4-4EC9-4C4D-8C87-164113AC5916}"/>
               </a:ext>
             </a:extLst>
           </p:cNvPr>
@@ -6056,7 +6056,7 @@
           <p:cNvPr id="11" name="">
             <a:extLst xmlns:a="http://schemas.openxmlformats.org/drawingml/2006/main">
               <a:ext uri="{FF2B5EF4-FFF2-40B4-BE49-F238E27FC236}">
-                <a16:creationId xmlns:a16="http://schemas.microsoft.com/office/drawing/2014/main" id="{071413B7-C775-4471-A582-5830CBA2E61D}"/>
+                <a16:creationId xmlns:a16="http://schemas.microsoft.com/office/drawing/2014/main" id="{61BD2E93-8C88-489F-A3F9-E4D099D9E29E}"/>
               </a:ext>
             </a:extLst>
           </p:cNvPr>
@@ -6088,7 +6088,7 @@
           <p:cNvPr id="12" name="">
             <a:extLst xmlns:a="http://schemas.openxmlformats.org/drawingml/2006/main">
               <a:ext uri="{FF2B5EF4-FFF2-40B4-BE49-F238E27FC236}">
-                <a16:creationId xmlns:a16="http://schemas.microsoft.com/office/drawing/2014/main" id="{943A47E2-9CB0-4BBC-9CB5-A7B2EC94DA26}"/>
+                <a16:creationId xmlns:a16="http://schemas.microsoft.com/office/drawing/2014/main" id="{9AB8645B-9C86-4DC4-B06A-8EFF63BDD8D1}"/>
               </a:ext>
             </a:extLst>
           </p:cNvPr>
@@ -6145,7 +6145,7 @@
           <p:cNvPr id="13" name="">
             <a:extLst xmlns:a="http://schemas.openxmlformats.org/drawingml/2006/main">
               <a:ext uri="{FF2B5EF4-FFF2-40B4-BE49-F238E27FC236}">
-                <a16:creationId xmlns:a16="http://schemas.microsoft.com/office/drawing/2014/main" id="{E04D24C7-8A8A-48C8-9C0E-D4E34F9D943B}"/>
+                <a16:creationId xmlns:a16="http://schemas.microsoft.com/office/drawing/2014/main" id="{B96ABABF-5F6B-4B46-9280-77AB0E134064}"/>
               </a:ext>
             </a:extLst>
           </p:cNvPr>
@@ -6202,7 +6202,7 @@
           <p:cNvPr id="14" name="">
             <a:extLst xmlns:a="http://schemas.openxmlformats.org/drawingml/2006/main">
               <a:ext uri="{FF2B5EF4-FFF2-40B4-BE49-F238E27FC236}">
-                <a16:creationId xmlns:a16="http://schemas.microsoft.com/office/drawing/2014/main" id="{9DA6A149-16D0-4050-8E2C-500C2970D891}"/>
+                <a16:creationId xmlns:a16="http://schemas.microsoft.com/office/drawing/2014/main" id="{DB4DE70A-9F36-48FB-A1BA-5DEA7EE7619E}"/>
               </a:ext>
             </a:extLst>
           </p:cNvPr>
@@ -6236,7 +6236,7 @@
           <p:cNvPr id="15" name="">
             <a:extLst xmlns:a="http://schemas.openxmlformats.org/drawingml/2006/main">
               <a:ext uri="{FF2B5EF4-FFF2-40B4-BE49-F238E27FC236}">
-                <a16:creationId xmlns:a16="http://schemas.microsoft.com/office/drawing/2014/main" id="{29B22792-E9C9-45D2-BEC5-C17E274E5030}"/>
+                <a16:creationId xmlns:a16="http://schemas.microsoft.com/office/drawing/2014/main" id="{C5DAE227-7ECF-4468-99A1-24A10BD45017}"/>
               </a:ext>
             </a:extLst>
           </p:cNvPr>
@@ -6268,7 +6268,7 @@
           <p:cNvPr id="16" name="">
             <a:extLst xmlns:a="http://schemas.openxmlformats.org/drawingml/2006/main">
               <a:ext uri="{FF2B5EF4-FFF2-40B4-BE49-F238E27FC236}">
-                <a16:creationId xmlns:a16="http://schemas.microsoft.com/office/drawing/2014/main" id="{74574289-46CE-4071-8741-D10A043CC183}"/>
+                <a16:creationId xmlns:a16="http://schemas.microsoft.com/office/drawing/2014/main" id="{B505311E-DC43-4EA5-ADCC-4A533EF20D50}"/>
               </a:ext>
             </a:extLst>
           </p:cNvPr>
@@ -6325,7 +6325,7 @@
           <p:cNvPr id="17" name="">
             <a:extLst xmlns:a="http://schemas.openxmlformats.org/drawingml/2006/main">
               <a:ext uri="{FF2B5EF4-FFF2-40B4-BE49-F238E27FC236}">
-                <a16:creationId xmlns:a16="http://schemas.microsoft.com/office/drawing/2014/main" id="{BD3E8449-71EF-477E-9455-AE8C1BD48AAE}"/>
+                <a16:creationId xmlns:a16="http://schemas.microsoft.com/office/drawing/2014/main" id="{AFDB7C6F-7C15-448C-8DC2-B58AD76FA7E1}"/>
               </a:ext>
             </a:extLst>
           </p:cNvPr>
@@ -6382,7 +6382,7 @@
           <p:cNvPr id="18" name="">
             <a:extLst xmlns:a="http://schemas.openxmlformats.org/drawingml/2006/main">
               <a:ext uri="{FF2B5EF4-FFF2-40B4-BE49-F238E27FC236}">
-                <a16:creationId xmlns:a16="http://schemas.microsoft.com/office/drawing/2014/main" id="{DB44A853-880A-4B9D-B170-4FC644F5CD78}"/>
+                <a16:creationId xmlns:a16="http://schemas.microsoft.com/office/drawing/2014/main" id="{6979DCE6-509A-4121-8EE0-CE59EC6C7C79}"/>
               </a:ext>
             </a:extLst>
           </p:cNvPr>
@@ -6416,7 +6416,7 @@
           <p:cNvPr id="19" name="">
             <a:extLst xmlns:a="http://schemas.openxmlformats.org/drawingml/2006/main">
               <a:ext uri="{FF2B5EF4-FFF2-40B4-BE49-F238E27FC236}">
-                <a16:creationId xmlns:a16="http://schemas.microsoft.com/office/drawing/2014/main" id="{B9CE3FAC-0AD4-4A9B-ABBA-A11FFA8D689B}"/>
+                <a16:creationId xmlns:a16="http://schemas.microsoft.com/office/drawing/2014/main" id="{B9EB895A-FC3A-48F9-9B7E-42139316D728}"/>
               </a:ext>
             </a:extLst>
           </p:cNvPr>
@@ -6448,7 +6448,7 @@
           <p:cNvPr id="20" name="">
             <a:extLst xmlns:a="http://schemas.openxmlformats.org/drawingml/2006/main">
               <a:ext uri="{FF2B5EF4-FFF2-40B4-BE49-F238E27FC236}">
-                <a16:creationId xmlns:a16="http://schemas.microsoft.com/office/drawing/2014/main" id="{48CF9F18-C1A2-4E35-BBD2-2BAB304FA279}"/>
+                <a16:creationId xmlns:a16="http://schemas.microsoft.com/office/drawing/2014/main" id="{13085172-60BD-4DF2-90AE-E9ECFAD13715}"/>
               </a:ext>
             </a:extLst>
           </p:cNvPr>
@@ -6505,7 +6505,7 @@
           <p:cNvPr id="21" name="">
             <a:extLst xmlns:a="http://schemas.openxmlformats.org/drawingml/2006/main">
               <a:ext uri="{FF2B5EF4-FFF2-40B4-BE49-F238E27FC236}">
-                <a16:creationId xmlns:a16="http://schemas.microsoft.com/office/drawing/2014/main" id="{75B6B771-B94A-4730-A3A9-05A3444D9FF5}"/>
+                <a16:creationId xmlns:a16="http://schemas.microsoft.com/office/drawing/2014/main" id="{F5F2A225-717D-4950-9BE6-A561290685AA}"/>
               </a:ext>
             </a:extLst>
           </p:cNvPr>
@@ -6562,7 +6562,7 @@
           <p:cNvPr id="22" name="">
             <a:extLst xmlns:a="http://schemas.openxmlformats.org/drawingml/2006/main">
               <a:ext uri="{FF2B5EF4-FFF2-40B4-BE49-F238E27FC236}">
-                <a16:creationId xmlns:a16="http://schemas.microsoft.com/office/drawing/2014/main" id="{7227B258-6626-4718-BDC3-7EAC6D5B6B30}"/>
+                <a16:creationId xmlns:a16="http://schemas.microsoft.com/office/drawing/2014/main" id="{B6079A98-6064-4485-AFB4-51519D621108}"/>
               </a:ext>
             </a:extLst>
           </p:cNvPr>
@@ -6617,7 +6617,7 @@
     </p:spTree>
     <p:extLst>
       <p:ext uri="{BB962C8B-B14F-4D97-AF65-F5344CB8AC3E}">
-        <p14:creationId xmlns:p14="http://schemas.microsoft.com/office/powerpoint/2010/main" val="535107040"/>
+        <p14:creationId xmlns:p14="http://schemas.microsoft.com/office/powerpoint/2010/main" val="1599182771"/>
       </p:ext>
     </p:extLst>
   </p:cSld>
@@ -6818,7 +6818,7 @@
           <p:cNvPr id="16" name="">
             <a:extLst xmlns:a="http://schemas.openxmlformats.org/drawingml/2006/main">
               <a:ext uri="{FF2B5EF4-FFF2-40B4-BE49-F238E27FC236}">
-                <a16:creationId xmlns:a16="http://schemas.microsoft.com/office/drawing/2014/main" id="{05FCBEB3-7720-442E-80F5-651BE7C15B9D}"/>
+                <a16:creationId xmlns:a16="http://schemas.microsoft.com/office/drawing/2014/main" id="{0AACC5FB-F5F4-4A1F-9C1C-422FD5C5B34D}"/>
               </a:ext>
             </a:extLst>
           </p:cNvPr>
@@ -6850,7 +6850,7 @@
           <p:cNvPr id="2" name="">
             <a:extLst xmlns:a="http://schemas.openxmlformats.org/drawingml/2006/main">
               <a:ext uri="{FF2B5EF4-FFF2-40B4-BE49-F238E27FC236}">
-                <a16:creationId xmlns:a16="http://schemas.microsoft.com/office/drawing/2014/main" id="{F0A060A6-724D-4AF9-BB35-BD853D81B61A}"/>
+                <a16:creationId xmlns:a16="http://schemas.microsoft.com/office/drawing/2014/main" id="{643A92A7-0F53-45DC-890F-543412700A1D}"/>
               </a:ext>
             </a:extLst>
           </p:cNvPr>
@@ -6907,7 +6907,7 @@
           <p:cNvPr id="3" name="">
             <a:extLst xmlns:a="http://schemas.openxmlformats.org/drawingml/2006/main">
               <a:ext uri="{FF2B5EF4-FFF2-40B4-BE49-F238E27FC236}">
-                <a16:creationId xmlns:a16="http://schemas.microsoft.com/office/drawing/2014/main" id="{E078AB85-E762-4DF7-8B0C-2B56391C6FE7}"/>
+                <a16:creationId xmlns:a16="http://schemas.microsoft.com/office/drawing/2014/main" id="{9CE28187-64F9-4353-9104-71BEBB3E4EEE}"/>
               </a:ext>
             </a:extLst>
           </p:cNvPr>
@@ -6939,7 +6939,7 @@
           <p:cNvPr id="4" name="">
             <a:extLst xmlns:a="http://schemas.openxmlformats.org/drawingml/2006/main">
               <a:ext uri="{FF2B5EF4-FFF2-40B4-BE49-F238E27FC236}">
-                <a16:creationId xmlns:a16="http://schemas.microsoft.com/office/drawing/2014/main" id="{5F6C50BA-A05E-4DC4-9DA0-4870FD1DC5D4}"/>
+                <a16:creationId xmlns:a16="http://schemas.microsoft.com/office/drawing/2014/main" id="{31C9EAC3-6DA0-418E-9A6C-87763D565026}"/>
               </a:ext>
             </a:extLst>
           </p:cNvPr>
@@ -6996,7 +6996,7 @@
           <p:cNvPr id="5" name="">
             <a:extLst xmlns:a="http://schemas.openxmlformats.org/drawingml/2006/main">
               <a:ext uri="{FF2B5EF4-FFF2-40B4-BE49-F238E27FC236}">
-                <a16:creationId xmlns:a16="http://schemas.microsoft.com/office/drawing/2014/main" id="{91D3697E-6077-4AAC-88EC-5C2AABF074FF}"/>
+                <a16:creationId xmlns:a16="http://schemas.microsoft.com/office/drawing/2014/main" id="{D65E14DC-11F1-4C00-9A2B-A0C650B3EBB0}"/>
               </a:ext>
             </a:extLst>
           </p:cNvPr>
@@ -7053,7 +7053,7 @@
           <p:cNvPr id="6" name="">
             <a:extLst xmlns:a="http://schemas.openxmlformats.org/drawingml/2006/main">
               <a:ext uri="{FF2B5EF4-FFF2-40B4-BE49-F238E27FC236}">
-                <a16:creationId xmlns:a16="http://schemas.microsoft.com/office/drawing/2014/main" id="{7580B972-22FC-46F3-A51A-BD27EEEBABA2}"/>
+                <a16:creationId xmlns:a16="http://schemas.microsoft.com/office/drawing/2014/main" id="{7DEE25F5-E8E8-465C-804C-3DF7E157C000}"/>
               </a:ext>
             </a:extLst>
           </p:cNvPr>
@@ -7110,7 +7110,7 @@
           <p:cNvPr id="7" name="">
             <a:extLst xmlns:a="http://schemas.openxmlformats.org/drawingml/2006/main">
               <a:ext uri="{FF2B5EF4-FFF2-40B4-BE49-F238E27FC236}">
-                <a16:creationId xmlns:a16="http://schemas.microsoft.com/office/drawing/2014/main" id="{F8032530-2E60-453E-9DC1-D1E7068A4076}"/>
+                <a16:creationId xmlns:a16="http://schemas.microsoft.com/office/drawing/2014/main" id="{2705B4A5-0673-497F-946E-285E5466EB71}"/>
               </a:ext>
             </a:extLst>
           </p:cNvPr>
@@ -7142,7 +7142,7 @@
           <p:cNvPr id="8" name="">
             <a:extLst xmlns:a="http://schemas.openxmlformats.org/drawingml/2006/main">
               <a:ext uri="{FF2B5EF4-FFF2-40B4-BE49-F238E27FC236}">
-                <a16:creationId xmlns:a16="http://schemas.microsoft.com/office/drawing/2014/main" id="{AE4981C7-3338-48F1-8F26-88E229A723C8}"/>
+                <a16:creationId xmlns:a16="http://schemas.microsoft.com/office/drawing/2014/main" id="{3685B74E-988D-491A-BFE4-C3279267E1F9}"/>
               </a:ext>
             </a:extLst>
           </p:cNvPr>
@@ -7199,7 +7199,7 @@
           <p:cNvPr id="9" name="">
             <a:extLst xmlns:a="http://schemas.openxmlformats.org/drawingml/2006/main">
               <a:ext uri="{FF2B5EF4-FFF2-40B4-BE49-F238E27FC236}">
-                <a16:creationId xmlns:a16="http://schemas.microsoft.com/office/drawing/2014/main" id="{553F6772-2B20-4F86-B904-3BBACBDCA341}"/>
+                <a16:creationId xmlns:a16="http://schemas.microsoft.com/office/drawing/2014/main" id="{21363820-D3DF-4224-98EB-7C527F4F197D}"/>
               </a:ext>
             </a:extLst>
           </p:cNvPr>
@@ -7256,7 +7256,7 @@
           <p:cNvPr id="10" name="">
             <a:extLst xmlns:a="http://schemas.openxmlformats.org/drawingml/2006/main">
               <a:ext uri="{FF2B5EF4-FFF2-40B4-BE49-F238E27FC236}">
-                <a16:creationId xmlns:a16="http://schemas.microsoft.com/office/drawing/2014/main" id="{5ADF38ED-A494-4BB5-8D9B-4A5CC5888B5D}"/>
+                <a16:creationId xmlns:a16="http://schemas.microsoft.com/office/drawing/2014/main" id="{B0A74411-6F38-4B31-8B69-2186F3509EE9}"/>
               </a:ext>
             </a:extLst>
           </p:cNvPr>
@@ -7313,7 +7313,7 @@
           <p:cNvPr id="11" name="">
             <a:extLst xmlns:a="http://schemas.openxmlformats.org/drawingml/2006/main">
               <a:ext uri="{FF2B5EF4-FFF2-40B4-BE49-F238E27FC236}">
-                <a16:creationId xmlns:a16="http://schemas.microsoft.com/office/drawing/2014/main" id="{FACBEFB7-3FE8-40DE-ABC1-979A177ED62A}"/>
+                <a16:creationId xmlns:a16="http://schemas.microsoft.com/office/drawing/2014/main" id="{F0AA45C6-E282-45AE-AC31-A388171238BD}"/>
               </a:ext>
             </a:extLst>
           </p:cNvPr>
@@ -7345,7 +7345,7 @@
           <p:cNvPr id="12" name="">
             <a:extLst xmlns:a="http://schemas.openxmlformats.org/drawingml/2006/main">
               <a:ext uri="{FF2B5EF4-FFF2-40B4-BE49-F238E27FC236}">
-                <a16:creationId xmlns:a16="http://schemas.microsoft.com/office/drawing/2014/main" id="{14DDED31-BFE3-48D8-B659-3C3AFAC35040}"/>
+                <a16:creationId xmlns:a16="http://schemas.microsoft.com/office/drawing/2014/main" id="{245F0906-2D78-4121-B5A5-A8331F33C346}"/>
               </a:ext>
             </a:extLst>
           </p:cNvPr>
@@ -7402,7 +7402,7 @@
           <p:cNvPr id="13" name="">
             <a:extLst xmlns:a="http://schemas.openxmlformats.org/drawingml/2006/main">
               <a:ext uri="{FF2B5EF4-FFF2-40B4-BE49-F238E27FC236}">
-                <a16:creationId xmlns:a16="http://schemas.microsoft.com/office/drawing/2014/main" id="{3E365AF8-FDEA-4E40-AED2-DE0CC0249020}"/>
+                <a16:creationId xmlns:a16="http://schemas.microsoft.com/office/drawing/2014/main" id="{53FB48F6-3F19-4725-A208-ACD8B6866CB3}"/>
               </a:ext>
             </a:extLst>
           </p:cNvPr>
@@ -7459,7 +7459,7 @@
           <p:cNvPr id="14" name="">
             <a:extLst xmlns:a="http://schemas.openxmlformats.org/drawingml/2006/main">
               <a:ext uri="{FF2B5EF4-FFF2-40B4-BE49-F238E27FC236}">
-                <a16:creationId xmlns:a16="http://schemas.microsoft.com/office/drawing/2014/main" id="{8F8A4157-CB39-426E-BEB1-CF0ADBAEAA54}"/>
+                <a16:creationId xmlns:a16="http://schemas.microsoft.com/office/drawing/2014/main" id="{9A1DFAE7-3D04-4AF3-8020-2150E95E1883}"/>
               </a:ext>
             </a:extLst>
           </p:cNvPr>
@@ -7516,7 +7516,7 @@
           <p:cNvPr id="15" name="">
             <a:extLst xmlns:a="http://schemas.openxmlformats.org/drawingml/2006/main">
               <a:ext uri="{FF2B5EF4-FFF2-40B4-BE49-F238E27FC236}">
-                <a16:creationId xmlns:a16="http://schemas.microsoft.com/office/drawing/2014/main" id="{0CD29160-DDC7-4E98-AD66-22B8BB9F69DB}"/>
+                <a16:creationId xmlns:a16="http://schemas.microsoft.com/office/drawing/2014/main" id="{4B507909-3C7E-428C-91C9-89391E0304FC}"/>
               </a:ext>
             </a:extLst>
           </p:cNvPr>
@@ -7571,7 +7571,7 @@
     </p:spTree>
     <p:extLst>
       <p:ext uri="{BB962C8B-B14F-4D97-AF65-F5344CB8AC3E}">
-        <p14:creationId xmlns:p14="http://schemas.microsoft.com/office/powerpoint/2010/main" val="1918631909"/>
+        <p14:creationId xmlns:p14="http://schemas.microsoft.com/office/powerpoint/2010/main" val="671812648"/>
       </p:ext>
     </p:extLst>
   </p:cSld>
@@ -7769,10 +7769,10 @@
       </p:grpSpPr>
       <p:sp>
         <p:nvSpPr>
-          <p:cNvPr id="23" name="">
-            <a:extLst xmlns:a="http://schemas.openxmlformats.org/drawingml/2006/main">
-              <a:ext uri="{FF2B5EF4-FFF2-40B4-BE49-F238E27FC236}">
-                <a16:creationId xmlns:a16="http://schemas.microsoft.com/office/drawing/2014/main" id="{D34BE62E-DA19-44C5-A65E-802529CFD183}"/>
+          <p:cNvPr id="26" name="">
+            <a:extLst xmlns:a="http://schemas.openxmlformats.org/drawingml/2006/main">
+              <a:ext uri="{FF2B5EF4-FFF2-40B4-BE49-F238E27FC236}">
+                <a16:creationId xmlns:a16="http://schemas.microsoft.com/office/drawing/2014/main" id="{907656AB-CC12-4D0D-8A90-62C47E26C84C}"/>
               </a:ext>
             </a:extLst>
           </p:cNvPr>
@@ -7804,7 +7804,7 @@
           <p:cNvPr id="2" name="">
             <a:extLst xmlns:a="http://schemas.openxmlformats.org/drawingml/2006/main">
               <a:ext uri="{FF2B5EF4-FFF2-40B4-BE49-F238E27FC236}">
-                <a16:creationId xmlns:a16="http://schemas.microsoft.com/office/drawing/2014/main" id="{9775431C-77C4-49AE-BD62-D9BE9FBCC021}"/>
+                <a16:creationId xmlns:a16="http://schemas.microsoft.com/office/drawing/2014/main" id="{CFDF713D-87E1-4B75-8187-5A332742BDBB}"/>
               </a:ext>
             </a:extLst>
           </p:cNvPr>
@@ -7861,7 +7861,7 @@
           <p:cNvPr id="3" name="">
             <a:extLst xmlns:a="http://schemas.openxmlformats.org/drawingml/2006/main">
               <a:ext uri="{FF2B5EF4-FFF2-40B4-BE49-F238E27FC236}">
-                <a16:creationId xmlns:a16="http://schemas.microsoft.com/office/drawing/2014/main" id="{FFA6F157-C9CC-4C22-9B7C-245F440A275A}"/>
+                <a16:creationId xmlns:a16="http://schemas.microsoft.com/office/drawing/2014/main" id="{42D3DA34-A000-45E7-BED0-FC39FA16F862}"/>
               </a:ext>
             </a:extLst>
           </p:cNvPr>
@@ -7893,7 +7893,7 @@
           <p:cNvPr id="4" name="">
             <a:extLst xmlns:a="http://schemas.openxmlformats.org/drawingml/2006/main">
               <a:ext uri="{FF2B5EF4-FFF2-40B4-BE49-F238E27FC236}">
-                <a16:creationId xmlns:a16="http://schemas.microsoft.com/office/drawing/2014/main" id="{0D4BCD28-6B70-4770-B913-BAB7A6FECAA8}"/>
+                <a16:creationId xmlns:a16="http://schemas.microsoft.com/office/drawing/2014/main" id="{344E395C-C73B-46C8-82F0-FAAEDB527FAA}"/>
               </a:ext>
             </a:extLst>
           </p:cNvPr>
@@ -7950,7 +7950,7 @@
           <p:cNvPr id="5" name="">
             <a:extLst xmlns:a="http://schemas.openxmlformats.org/drawingml/2006/main">
               <a:ext uri="{FF2B5EF4-FFF2-40B4-BE49-F238E27FC236}">
-                <a16:creationId xmlns:a16="http://schemas.microsoft.com/office/drawing/2014/main" id="{A4101BD9-A3CF-421E-9D01-B34852AACBC1}"/>
+                <a16:creationId xmlns:a16="http://schemas.microsoft.com/office/drawing/2014/main" id="{01DFFB88-47BD-45A4-82CC-D56192D74F2C}"/>
               </a:ext>
             </a:extLst>
           </p:cNvPr>
@@ -8007,7 +8007,7 @@
           <p:cNvPr id="6" name="">
             <a:extLst xmlns:a="http://schemas.openxmlformats.org/drawingml/2006/main">
               <a:ext uri="{FF2B5EF4-FFF2-40B4-BE49-F238E27FC236}">
-                <a16:creationId xmlns:a16="http://schemas.microsoft.com/office/drawing/2014/main" id="{4E5E6C70-CAD2-413D-96F6-B9318BEBB1B9}"/>
+                <a16:creationId xmlns:a16="http://schemas.microsoft.com/office/drawing/2014/main" id="{7DF2EF00-6774-4E74-B4C4-09B7A716039F}"/>
               </a:ext>
             </a:extLst>
           </p:cNvPr>
@@ -8064,7 +8064,7 @@
           <p:cNvPr id="7" name="">
             <a:extLst xmlns:a="http://schemas.openxmlformats.org/drawingml/2006/main">
               <a:ext uri="{FF2B5EF4-FFF2-40B4-BE49-F238E27FC236}">
-                <a16:creationId xmlns:a16="http://schemas.microsoft.com/office/drawing/2014/main" id="{A951C134-3060-48F6-B5BB-3B269FD1C4E0}"/>
+                <a16:creationId xmlns:a16="http://schemas.microsoft.com/office/drawing/2014/main" id="{EAA927F9-8818-4093-8AAF-DD8876C2621F}"/>
               </a:ext>
             </a:extLst>
           </p:cNvPr>
@@ -8096,7 +8096,7 @@
           <p:cNvPr id="8" name="">
             <a:extLst xmlns:a="http://schemas.openxmlformats.org/drawingml/2006/main">
               <a:ext uri="{FF2B5EF4-FFF2-40B4-BE49-F238E27FC236}">
-                <a16:creationId xmlns:a16="http://schemas.microsoft.com/office/drawing/2014/main" id="{267F1161-152E-4BA0-949B-AA49845527D2}"/>
+                <a16:creationId xmlns:a16="http://schemas.microsoft.com/office/drawing/2014/main" id="{41A30E8E-CFB2-4783-9A07-F8F5C14F9F21}"/>
               </a:ext>
             </a:extLst>
           </p:cNvPr>
@@ -8153,7 +8153,7 @@
           <p:cNvPr id="9" name="">
             <a:extLst xmlns:a="http://schemas.openxmlformats.org/drawingml/2006/main">
               <a:ext uri="{FF2B5EF4-FFF2-40B4-BE49-F238E27FC236}">
-                <a16:creationId xmlns:a16="http://schemas.microsoft.com/office/drawing/2014/main" id="{A1F89747-31C9-4DB8-85B9-ED895EAF425A}"/>
+                <a16:creationId xmlns:a16="http://schemas.microsoft.com/office/drawing/2014/main" id="{C55EA570-2BF0-4918-93E9-397E10756884}"/>
               </a:ext>
             </a:extLst>
           </p:cNvPr>
@@ -8210,19 +8210,19 @@
           <p:cNvPr id="10" name="">
             <a:extLst xmlns:a="http://schemas.openxmlformats.org/drawingml/2006/main">
               <a:ext uri="{FF2B5EF4-FFF2-40B4-BE49-F238E27FC236}">
-                <a16:creationId xmlns:a16="http://schemas.microsoft.com/office/drawing/2014/main" id="{C086E504-2465-4D96-AD3A-94E1D4B377E2}"/>
-              </a:ext>
-            </a:extLst>
-          </p:cNvPr>
-          <p:cNvSpPr>
-            <a:spLocks xmlns:a="http://schemas.openxmlformats.org/drawingml/2006/main" noGrp="1"/>
-          </p:cNvSpPr>
-          <p:nvPr/>
-        </p:nvSpPr>
-        <p:spPr>
-          <a:xfrm xmlns:a="http://schemas.openxmlformats.org/drawingml/2006/main">
-            <a:off x="914400" y="1257300"/>
-            <a:ext cx="10363200" cy="781050"/>
+                <a16:creationId xmlns:a16="http://schemas.microsoft.com/office/drawing/2014/main" id="{B8A25FCA-14AC-435D-BF86-151ACC60692E}"/>
+              </a:ext>
+            </a:extLst>
+          </p:cNvPr>
+          <p:cNvSpPr>
+            <a:spLocks xmlns:a="http://schemas.openxmlformats.org/drawingml/2006/main" noGrp="1"/>
+          </p:cNvSpPr>
+          <p:nvPr/>
+        </p:nvSpPr>
+        <p:spPr>
+          <a:xfrm xmlns:a="http://schemas.openxmlformats.org/drawingml/2006/main">
+            <a:off x="857250" y="1219200"/>
+            <a:ext cx="10477500" cy="742950"/>
           </a:xfrm>
           <a:prstGeom xmlns:a="http://schemas.openxmlformats.org/drawingml/2006/main" prst="rect">
             <a:avLst/>
@@ -8239,7 +8239,7 @@
           <a:lstStyle xmlns:a="http://schemas.openxmlformats.org/drawingml/2006/main"/>
           <a:p xmlns:a="http://schemas.openxmlformats.org/drawingml/2006/main">
             <a:pPr algn="ctr">
-              <a:defRPr sz="2175" b="1">
+              <a:defRPr sz="2100" b="1">
                 <a:solidFill>
                   <a:srgbClr val="17253A"/>
                 </a:solidFill>
@@ -8249,7 +8249,7 @@
               </a:defRPr>
             </a:pPr>
             <a:r>
-              <a:rPr sz="2175" b="1">
+              <a:rPr sz="2100" b="1">
                 <a:solidFill>
                   <a:srgbClr val="17253A"/>
                 </a:solidFill>
@@ -8267,28 +8267,30 @@
           <p:cNvPr id="11" name="">
             <a:extLst xmlns:a="http://schemas.openxmlformats.org/drawingml/2006/main">
               <a:ext uri="{FF2B5EF4-FFF2-40B4-BE49-F238E27FC236}">
-                <a16:creationId xmlns:a16="http://schemas.microsoft.com/office/drawing/2014/main" id="{E1A8244C-ED3B-4225-BC77-C7437248C2DE}"/>
-              </a:ext>
-            </a:extLst>
-          </p:cNvPr>
-          <p:cNvSpPr>
-            <a:spLocks xmlns:a="http://schemas.openxmlformats.org/drawingml/2006/main" noGrp="1"/>
-          </p:cNvSpPr>
-          <p:nvPr/>
-        </p:nvSpPr>
-        <p:spPr>
-          <a:xfrm xmlns:a="http://schemas.openxmlformats.org/drawingml/2006/main">
-            <a:off x="1000125" y="2247900"/>
-            <a:ext cx="476250" cy="476250"/>
-          </a:xfrm>
-          <a:prstGeom xmlns:a="http://schemas.openxmlformats.org/drawingml/2006/main" prst="ellipse">
+                <a16:creationId xmlns:a16="http://schemas.microsoft.com/office/drawing/2014/main" id="{3C8F5FDB-232B-4965-A4E4-5DDA016BCFC9}"/>
+              </a:ext>
+            </a:extLst>
+          </p:cNvPr>
+          <p:cNvSpPr>
+            <a:spLocks xmlns:a="http://schemas.openxmlformats.org/drawingml/2006/main" noGrp="1"/>
+          </p:cNvSpPr>
+          <p:nvPr/>
+        </p:nvSpPr>
+        <p:spPr>
+          <a:xfrm xmlns:a="http://schemas.openxmlformats.org/drawingml/2006/main">
+            <a:off x="971550" y="2124075"/>
+            <a:ext cx="38100" cy="3524250"/>
+          </a:xfrm>
+          <a:prstGeom xmlns:a="http://schemas.openxmlformats.org/drawingml/2006/main" prst="rect">
             <a:avLst/>
           </a:prstGeom>
           <a:solidFill xmlns:a="http://schemas.openxmlformats.org/drawingml/2006/main">
-            <a:srgbClr val="18324A"/>
+            <a:srgbClr val="2C6E73"/>
           </a:solidFill>
           <a:ln xmlns:a="http://schemas.openxmlformats.org/drawingml/2006/main" w="0">
-            <a:noFill/>
+            <a:solidFill>
+              <a:srgbClr val="2C6E73"/>
+            </a:solidFill>
           </a:ln>
         </p:spPr>
       </p:sp>
@@ -8297,19 +8299,19 @@
           <p:cNvPr id="12" name="">
             <a:extLst xmlns:a="http://schemas.openxmlformats.org/drawingml/2006/main">
               <a:ext uri="{FF2B5EF4-FFF2-40B4-BE49-F238E27FC236}">
-                <a16:creationId xmlns:a16="http://schemas.microsoft.com/office/drawing/2014/main" id="{6A930175-460F-435F-81A9-F3E4822BDD86}"/>
-              </a:ext>
-            </a:extLst>
-          </p:cNvPr>
-          <p:cNvSpPr>
-            <a:spLocks xmlns:a="http://schemas.openxmlformats.org/drawingml/2006/main" noGrp="1"/>
-          </p:cNvSpPr>
-          <p:nvPr/>
-        </p:nvSpPr>
-        <p:spPr>
-          <a:xfrm xmlns:a="http://schemas.openxmlformats.org/drawingml/2006/main">
-            <a:off x="1000125" y="2276475"/>
-            <a:ext cx="476250" cy="419100"/>
+                <a16:creationId xmlns:a16="http://schemas.microsoft.com/office/drawing/2014/main" id="{558443CA-4BEF-43E7-9532-D96C76187A23}"/>
+              </a:ext>
+            </a:extLst>
+          </p:cNvPr>
+          <p:cNvSpPr>
+            <a:spLocks xmlns:a="http://schemas.openxmlformats.org/drawingml/2006/main" noGrp="1"/>
+          </p:cNvSpPr>
+          <p:nvPr/>
+        </p:nvSpPr>
+        <p:spPr>
+          <a:xfrm xmlns:a="http://schemas.openxmlformats.org/drawingml/2006/main">
+            <a:off x="1162050" y="2200275"/>
+            <a:ext cx="400050" cy="400050"/>
           </a:xfrm>
           <a:prstGeom xmlns:a="http://schemas.openxmlformats.org/drawingml/2006/main" prst="rect">
             <a:avLst/>
@@ -8326,9 +8328,9 @@
           <a:lstStyle xmlns:a="http://schemas.openxmlformats.org/drawingml/2006/main"/>
           <a:p xmlns:a="http://schemas.openxmlformats.org/drawingml/2006/main">
             <a:pPr algn="ctr">
-              <a:defRPr sz="1350" b="1">
-                <a:solidFill>
-                  <a:srgbClr val="FFFFFF"/>
+              <a:defRPr sz="1125" b="1">
+                <a:solidFill>
+                  <a:srgbClr val="2C6E73"/>
                 </a:solidFill>
                 <a:latin typeface="Arial"/>
                 <a:ea typeface="Arial"/>
@@ -8336,9 +8338,9 @@
               </a:defRPr>
             </a:pPr>
             <a:r>
-              <a:rPr sz="1350" b="1">
-                <a:solidFill>
-                  <a:srgbClr val="FFFFFF"/>
+              <a:rPr sz="1125" b="1">
+                <a:solidFill>
+                  <a:srgbClr val="2C6E73"/>
                 </a:solidFill>
                 <a:latin typeface="Arial"/>
                 <a:ea typeface="Arial"/>
@@ -8354,19 +8356,19 @@
           <p:cNvPr id="13" name="">
             <a:extLst xmlns:a="http://schemas.openxmlformats.org/drawingml/2006/main">
               <a:ext uri="{FF2B5EF4-FFF2-40B4-BE49-F238E27FC236}">
-                <a16:creationId xmlns:a16="http://schemas.microsoft.com/office/drawing/2014/main" id="{0A204625-961D-4861-A4E0-A0EE71D14882}"/>
-              </a:ext>
-            </a:extLst>
-          </p:cNvPr>
-          <p:cNvSpPr>
-            <a:spLocks xmlns:a="http://schemas.openxmlformats.org/drawingml/2006/main" noGrp="1"/>
-          </p:cNvSpPr>
-          <p:nvPr/>
-        </p:nvSpPr>
-        <p:spPr>
-          <a:xfrm xmlns:a="http://schemas.openxmlformats.org/drawingml/2006/main">
-            <a:off x="1714500" y="2181225"/>
-            <a:ext cx="9429750" cy="609600"/>
+                <a16:creationId xmlns:a16="http://schemas.microsoft.com/office/drawing/2014/main" id="{FD9D2809-6AA8-4BB8-9387-05E2C48E26CA}"/>
+              </a:ext>
+            </a:extLst>
+          </p:cNvPr>
+          <p:cNvSpPr>
+            <a:spLocks xmlns:a="http://schemas.openxmlformats.org/drawingml/2006/main" noGrp="1"/>
+          </p:cNvSpPr>
+          <p:nvPr/>
+        </p:nvSpPr>
+        <p:spPr>
+          <a:xfrm xmlns:a="http://schemas.openxmlformats.org/drawingml/2006/main">
+            <a:off x="1714500" y="2114550"/>
+            <a:ext cx="9525000" cy="638175"/>
           </a:xfrm>
           <a:prstGeom xmlns:a="http://schemas.openxmlformats.org/drawingml/2006/main" prst="rect">
             <a:avLst/>
@@ -8383,7 +8385,7 @@
           <a:lstStyle xmlns:a="http://schemas.openxmlformats.org/drawingml/2006/main"/>
           <a:p xmlns:a="http://schemas.openxmlformats.org/drawingml/2006/main">
             <a:pPr algn="l">
-              <a:defRPr sz="1500" b="0">
+              <a:defRPr sz="1575" b="0">
                 <a:solidFill>
                   <a:srgbClr val="17253A"/>
                 </a:solidFill>
@@ -8393,7 +8395,7 @@
               </a:defRPr>
             </a:pPr>
             <a:r>
-              <a:rPr sz="1500" b="0">
+              <a:rPr sz="1575" b="0">
                 <a:solidFill>
                   <a:srgbClr val="17253A"/>
                 </a:solidFill>
@@ -8401,7 +8403,7 @@
                 <a:ea typeface="Arial"/>
                 <a:cs typeface="Arial"/>
               </a:rPr>
-              <a:t>Identify the structure: Identify brackets and multiplication or division before calculating.</a:t>
+              <a:t>6 × (n + 5) = 72</a:t>
             </a:r>
           </a:p>
         </p:txBody>
@@ -8411,28 +8413,30 @@
           <p:cNvPr id="14" name="">
             <a:extLst xmlns:a="http://schemas.openxmlformats.org/drawingml/2006/main">
               <a:ext uri="{FF2B5EF4-FFF2-40B4-BE49-F238E27FC236}">
-                <a16:creationId xmlns:a16="http://schemas.microsoft.com/office/drawing/2014/main" id="{4E7E242A-6155-475F-81AE-6866CEA72CBB}"/>
-              </a:ext>
-            </a:extLst>
-          </p:cNvPr>
-          <p:cNvSpPr>
-            <a:spLocks xmlns:a="http://schemas.openxmlformats.org/drawingml/2006/main" noGrp="1"/>
-          </p:cNvSpPr>
-          <p:nvPr/>
-        </p:nvSpPr>
-        <p:spPr>
-          <a:xfrm xmlns:a="http://schemas.openxmlformats.org/drawingml/2006/main">
-            <a:off x="1000125" y="2990850"/>
-            <a:ext cx="476250" cy="476250"/>
-          </a:xfrm>
-          <a:prstGeom xmlns:a="http://schemas.openxmlformats.org/drawingml/2006/main" prst="ellipse">
+                <a16:creationId xmlns:a16="http://schemas.microsoft.com/office/drawing/2014/main" id="{2C25A691-A5F3-463C-B27F-4487A67ED2A1}"/>
+              </a:ext>
+            </a:extLst>
+          </p:cNvPr>
+          <p:cNvSpPr>
+            <a:spLocks xmlns:a="http://schemas.openxmlformats.org/drawingml/2006/main" noGrp="1"/>
+          </p:cNvSpPr>
+          <p:nvPr/>
+        </p:nvSpPr>
+        <p:spPr>
+          <a:xfrm xmlns:a="http://schemas.openxmlformats.org/drawingml/2006/main">
+            <a:off x="1714500" y="2771775"/>
+            <a:ext cx="9334500" cy="9525"/>
+          </a:xfrm>
+          <a:prstGeom xmlns:a="http://schemas.openxmlformats.org/drawingml/2006/main" prst="rect">
             <a:avLst/>
           </a:prstGeom>
           <a:solidFill xmlns:a="http://schemas.openxmlformats.org/drawingml/2006/main">
-            <a:srgbClr val="2C6E73"/>
+            <a:srgbClr val="D9E0E6"/>
           </a:solidFill>
           <a:ln xmlns:a="http://schemas.openxmlformats.org/drawingml/2006/main" w="0">
-            <a:noFill/>
+            <a:solidFill>
+              <a:srgbClr val="D9E0E6"/>
+            </a:solidFill>
           </a:ln>
         </p:spPr>
       </p:sp>
@@ -8441,19 +8445,19 @@
           <p:cNvPr id="15" name="">
             <a:extLst xmlns:a="http://schemas.openxmlformats.org/drawingml/2006/main">
               <a:ext uri="{FF2B5EF4-FFF2-40B4-BE49-F238E27FC236}">
-                <a16:creationId xmlns:a16="http://schemas.microsoft.com/office/drawing/2014/main" id="{049FECD1-F2D3-498E-AF70-55E497E14325}"/>
-              </a:ext>
-            </a:extLst>
-          </p:cNvPr>
-          <p:cNvSpPr>
-            <a:spLocks xmlns:a="http://schemas.openxmlformats.org/drawingml/2006/main" noGrp="1"/>
-          </p:cNvSpPr>
-          <p:nvPr/>
-        </p:nvSpPr>
-        <p:spPr>
-          <a:xfrm xmlns:a="http://schemas.openxmlformats.org/drawingml/2006/main">
-            <a:off x="1000125" y="3019425"/>
-            <a:ext cx="476250" cy="419100"/>
+                <a16:creationId xmlns:a16="http://schemas.microsoft.com/office/drawing/2014/main" id="{A9C33DB4-7417-43D0-9645-CD6916C7D331}"/>
+              </a:ext>
+            </a:extLst>
+          </p:cNvPr>
+          <p:cNvSpPr>
+            <a:spLocks xmlns:a="http://schemas.openxmlformats.org/drawingml/2006/main" noGrp="1"/>
+          </p:cNvSpPr>
+          <p:nvPr/>
+        </p:nvSpPr>
+        <p:spPr>
+          <a:xfrm xmlns:a="http://schemas.openxmlformats.org/drawingml/2006/main">
+            <a:off x="1162050" y="2905125"/>
+            <a:ext cx="400050" cy="400050"/>
           </a:xfrm>
           <a:prstGeom xmlns:a="http://schemas.openxmlformats.org/drawingml/2006/main" prst="rect">
             <a:avLst/>
@@ -8470,9 +8474,9 @@
           <a:lstStyle xmlns:a="http://schemas.openxmlformats.org/drawingml/2006/main"/>
           <a:p xmlns:a="http://schemas.openxmlformats.org/drawingml/2006/main">
             <a:pPr algn="ctr">
-              <a:defRPr sz="1350" b="1">
-                <a:solidFill>
-                  <a:srgbClr val="FFFFFF"/>
+              <a:defRPr sz="1125" b="1">
+                <a:solidFill>
+                  <a:srgbClr val="2C6E73"/>
                 </a:solidFill>
                 <a:latin typeface="Arial"/>
                 <a:ea typeface="Arial"/>
@@ -8480,9 +8484,9 @@
               </a:defRPr>
             </a:pPr>
             <a:r>
-              <a:rPr sz="1350" b="1">
-                <a:solidFill>
-                  <a:srgbClr val="FFFFFF"/>
+              <a:rPr sz="1125" b="1">
+                <a:solidFill>
+                  <a:srgbClr val="2C6E73"/>
                 </a:solidFill>
                 <a:latin typeface="Arial"/>
                 <a:ea typeface="Arial"/>
@@ -8498,19 +8502,19 @@
           <p:cNvPr id="16" name="">
             <a:extLst xmlns:a="http://schemas.openxmlformats.org/drawingml/2006/main">
               <a:ext uri="{FF2B5EF4-FFF2-40B4-BE49-F238E27FC236}">
-                <a16:creationId xmlns:a16="http://schemas.microsoft.com/office/drawing/2014/main" id="{7C3072E5-0219-4491-97B5-7E75D902F0C0}"/>
-              </a:ext>
-            </a:extLst>
-          </p:cNvPr>
-          <p:cNvSpPr>
-            <a:spLocks xmlns:a="http://schemas.openxmlformats.org/drawingml/2006/main" noGrp="1"/>
-          </p:cNvSpPr>
-          <p:nvPr/>
-        </p:nvSpPr>
-        <p:spPr>
-          <a:xfrm xmlns:a="http://schemas.openxmlformats.org/drawingml/2006/main">
-            <a:off x="1714500" y="2924175"/>
-            <a:ext cx="9429750" cy="609600"/>
+                <a16:creationId xmlns:a16="http://schemas.microsoft.com/office/drawing/2014/main" id="{39C54660-9622-4500-9C99-FC36A73A4F05}"/>
+              </a:ext>
+            </a:extLst>
+          </p:cNvPr>
+          <p:cNvSpPr>
+            <a:spLocks xmlns:a="http://schemas.openxmlformats.org/drawingml/2006/main" noGrp="1"/>
+          </p:cNvSpPr>
+          <p:nvPr/>
+        </p:nvSpPr>
+        <p:spPr>
+          <a:xfrm xmlns:a="http://schemas.openxmlformats.org/drawingml/2006/main">
+            <a:off x="1714500" y="2819400"/>
+            <a:ext cx="9525000" cy="638175"/>
           </a:xfrm>
           <a:prstGeom xmlns:a="http://schemas.openxmlformats.org/drawingml/2006/main" prst="rect">
             <a:avLst/>
@@ -8527,7 +8531,7 @@
           <a:lstStyle xmlns:a="http://schemas.openxmlformats.org/drawingml/2006/main"/>
           <a:p xmlns:a="http://schemas.openxmlformats.org/drawingml/2006/main">
             <a:pPr algn="l">
-              <a:defRPr sz="1500" b="0">
+              <a:defRPr sz="1575" b="0">
                 <a:solidFill>
                   <a:srgbClr val="17253A"/>
                 </a:solidFill>
@@ -8537,7 +8541,7 @@
               </a:defRPr>
             </a:pPr>
             <a:r>
-              <a:rPr sz="1500" b="0">
+              <a:rPr sz="1575" b="0">
                 <a:solidFill>
                   <a:srgbClr val="17253A"/>
                 </a:solidFill>
@@ -8545,7 +8549,7 @@
                 <a:ea typeface="Arial"/>
                 <a:cs typeface="Arial"/>
               </a:rPr>
-              <a:t>Set up the method: Work through operations of equal priority from left to right.</a:t>
+              <a:t>n + 5 = 72 ÷ 6</a:t>
             </a:r>
           </a:p>
         </p:txBody>
@@ -8555,28 +8559,30 @@
           <p:cNvPr id="17" name="">
             <a:extLst xmlns:a="http://schemas.openxmlformats.org/drawingml/2006/main">
               <a:ext uri="{FF2B5EF4-FFF2-40B4-BE49-F238E27FC236}">
-                <a16:creationId xmlns:a16="http://schemas.microsoft.com/office/drawing/2014/main" id="{42F8F175-C3C8-4E94-A2D5-DB864A883C76}"/>
-              </a:ext>
-            </a:extLst>
-          </p:cNvPr>
-          <p:cNvSpPr>
-            <a:spLocks xmlns:a="http://schemas.openxmlformats.org/drawingml/2006/main" noGrp="1"/>
-          </p:cNvSpPr>
-          <p:nvPr/>
-        </p:nvSpPr>
-        <p:spPr>
-          <a:xfrm xmlns:a="http://schemas.openxmlformats.org/drawingml/2006/main">
-            <a:off x="1000125" y="3733800"/>
-            <a:ext cx="476250" cy="476250"/>
-          </a:xfrm>
-          <a:prstGeom xmlns:a="http://schemas.openxmlformats.org/drawingml/2006/main" prst="ellipse">
+                <a16:creationId xmlns:a16="http://schemas.microsoft.com/office/drawing/2014/main" id="{AAA878E0-B612-4D89-9385-3ACE0236299E}"/>
+              </a:ext>
+            </a:extLst>
+          </p:cNvPr>
+          <p:cNvSpPr>
+            <a:spLocks xmlns:a="http://schemas.openxmlformats.org/drawingml/2006/main" noGrp="1"/>
+          </p:cNvSpPr>
+          <p:nvPr/>
+        </p:nvSpPr>
+        <p:spPr>
+          <a:xfrm xmlns:a="http://schemas.openxmlformats.org/drawingml/2006/main">
+            <a:off x="1714500" y="3476625"/>
+            <a:ext cx="9334500" cy="9525"/>
+          </a:xfrm>
+          <a:prstGeom xmlns:a="http://schemas.openxmlformats.org/drawingml/2006/main" prst="rect">
             <a:avLst/>
           </a:prstGeom>
           <a:solidFill xmlns:a="http://schemas.openxmlformats.org/drawingml/2006/main">
-            <a:srgbClr val="2C6E73"/>
+            <a:srgbClr val="D9E0E6"/>
           </a:solidFill>
           <a:ln xmlns:a="http://schemas.openxmlformats.org/drawingml/2006/main" w="0">
-            <a:noFill/>
+            <a:solidFill>
+              <a:srgbClr val="D9E0E6"/>
+            </a:solidFill>
           </a:ln>
         </p:spPr>
       </p:sp>
@@ -8585,19 +8591,19 @@
           <p:cNvPr id="18" name="">
             <a:extLst xmlns:a="http://schemas.openxmlformats.org/drawingml/2006/main">
               <a:ext uri="{FF2B5EF4-FFF2-40B4-BE49-F238E27FC236}">
-                <a16:creationId xmlns:a16="http://schemas.microsoft.com/office/drawing/2014/main" id="{8C319712-CA48-425B-860C-E05A62C2F47F}"/>
-              </a:ext>
-            </a:extLst>
-          </p:cNvPr>
-          <p:cNvSpPr>
-            <a:spLocks xmlns:a="http://schemas.openxmlformats.org/drawingml/2006/main" noGrp="1"/>
-          </p:cNvSpPr>
-          <p:nvPr/>
-        </p:nvSpPr>
-        <p:spPr>
-          <a:xfrm xmlns:a="http://schemas.openxmlformats.org/drawingml/2006/main">
-            <a:off x="1000125" y="3762375"/>
-            <a:ext cx="476250" cy="419100"/>
+                <a16:creationId xmlns:a16="http://schemas.microsoft.com/office/drawing/2014/main" id="{7A0BB4EC-3EE7-428C-9EDC-72EB3F7DC738}"/>
+              </a:ext>
+            </a:extLst>
+          </p:cNvPr>
+          <p:cNvSpPr>
+            <a:spLocks xmlns:a="http://schemas.openxmlformats.org/drawingml/2006/main" noGrp="1"/>
+          </p:cNvSpPr>
+          <p:nvPr/>
+        </p:nvSpPr>
+        <p:spPr>
+          <a:xfrm xmlns:a="http://schemas.openxmlformats.org/drawingml/2006/main">
+            <a:off x="1162050" y="3609975"/>
+            <a:ext cx="400050" cy="400050"/>
           </a:xfrm>
           <a:prstGeom xmlns:a="http://schemas.openxmlformats.org/drawingml/2006/main" prst="rect">
             <a:avLst/>
@@ -8614,9 +8620,9 @@
           <a:lstStyle xmlns:a="http://schemas.openxmlformats.org/drawingml/2006/main"/>
           <a:p xmlns:a="http://schemas.openxmlformats.org/drawingml/2006/main">
             <a:pPr algn="ctr">
-              <a:defRPr sz="1350" b="1">
-                <a:solidFill>
-                  <a:srgbClr val="FFFFFF"/>
+              <a:defRPr sz="1125" b="1">
+                <a:solidFill>
+                  <a:srgbClr val="2C6E73"/>
                 </a:solidFill>
                 <a:latin typeface="Arial"/>
                 <a:ea typeface="Arial"/>
@@ -8624,9 +8630,9 @@
               </a:defRPr>
             </a:pPr>
             <a:r>
-              <a:rPr sz="1350" b="1">
-                <a:solidFill>
-                  <a:srgbClr val="FFFFFF"/>
+              <a:rPr sz="1125" b="1">
+                <a:solidFill>
+                  <a:srgbClr val="2C6E73"/>
                 </a:solidFill>
                 <a:latin typeface="Arial"/>
                 <a:ea typeface="Arial"/>
@@ -8642,19 +8648,19 @@
           <p:cNvPr id="19" name="">
             <a:extLst xmlns:a="http://schemas.openxmlformats.org/drawingml/2006/main">
               <a:ext uri="{FF2B5EF4-FFF2-40B4-BE49-F238E27FC236}">
-                <a16:creationId xmlns:a16="http://schemas.microsoft.com/office/drawing/2014/main" id="{74700A9B-E3BB-44BF-B6D5-E2C92C3AF5A2}"/>
-              </a:ext>
-            </a:extLst>
-          </p:cNvPr>
-          <p:cNvSpPr>
-            <a:spLocks xmlns:a="http://schemas.openxmlformats.org/drawingml/2006/main" noGrp="1"/>
-          </p:cNvSpPr>
-          <p:nvPr/>
-        </p:nvSpPr>
-        <p:spPr>
-          <a:xfrm xmlns:a="http://schemas.openxmlformats.org/drawingml/2006/main">
-            <a:off x="1714500" y="3667125"/>
-            <a:ext cx="9429750" cy="609600"/>
+                <a16:creationId xmlns:a16="http://schemas.microsoft.com/office/drawing/2014/main" id="{56BF50D6-F388-4300-8860-8CAA0036B4CD}"/>
+              </a:ext>
+            </a:extLst>
+          </p:cNvPr>
+          <p:cNvSpPr>
+            <a:spLocks xmlns:a="http://schemas.openxmlformats.org/drawingml/2006/main" noGrp="1"/>
+          </p:cNvSpPr>
+          <p:nvPr/>
+        </p:nvSpPr>
+        <p:spPr>
+          <a:xfrm xmlns:a="http://schemas.openxmlformats.org/drawingml/2006/main">
+            <a:off x="1714500" y="3524250"/>
+            <a:ext cx="9525000" cy="638175"/>
           </a:xfrm>
           <a:prstGeom xmlns:a="http://schemas.openxmlformats.org/drawingml/2006/main" prst="rect">
             <a:avLst/>
@@ -8671,7 +8677,7 @@
           <a:lstStyle xmlns:a="http://schemas.openxmlformats.org/drawingml/2006/main"/>
           <a:p xmlns:a="http://schemas.openxmlformats.org/drawingml/2006/main">
             <a:pPr algn="l">
-              <a:defRPr sz="1500" b="0">
+              <a:defRPr sz="1575" b="0">
                 <a:solidFill>
                   <a:srgbClr val="17253A"/>
                 </a:solidFill>
@@ -8681,7 +8687,7 @@
               </a:defRPr>
             </a:pPr>
             <a:r>
-              <a:rPr sz="1500" b="0">
+              <a:rPr sz="1575" b="0">
                 <a:solidFill>
                   <a:srgbClr val="17253A"/>
                 </a:solidFill>
@@ -8689,7 +8695,7 @@
                 <a:ea typeface="Arial"/>
                 <a:cs typeface="Arial"/>
               </a:rPr>
-              <a:t>Complete the calculation: n = 7.</a:t>
+              <a:t>n + 5 = 12</a:t>
             </a:r>
           </a:p>
         </p:txBody>
@@ -8699,28 +8705,30 @@
           <p:cNvPr id="20" name="">
             <a:extLst xmlns:a="http://schemas.openxmlformats.org/drawingml/2006/main">
               <a:ext uri="{FF2B5EF4-FFF2-40B4-BE49-F238E27FC236}">
-                <a16:creationId xmlns:a16="http://schemas.microsoft.com/office/drawing/2014/main" id="{19E9340D-BF88-446B-9863-EC37AC1DE06A}"/>
-              </a:ext>
-            </a:extLst>
-          </p:cNvPr>
-          <p:cNvSpPr>
-            <a:spLocks xmlns:a="http://schemas.openxmlformats.org/drawingml/2006/main" noGrp="1"/>
-          </p:cNvSpPr>
-          <p:nvPr/>
-        </p:nvSpPr>
-        <p:spPr>
-          <a:xfrm xmlns:a="http://schemas.openxmlformats.org/drawingml/2006/main">
-            <a:off x="1000125" y="4476750"/>
-            <a:ext cx="476250" cy="476250"/>
-          </a:xfrm>
-          <a:prstGeom xmlns:a="http://schemas.openxmlformats.org/drawingml/2006/main" prst="ellipse">
+                <a16:creationId xmlns:a16="http://schemas.microsoft.com/office/drawing/2014/main" id="{F4697456-45B5-4F5C-9EA1-8FCBDEA01DCB}"/>
+              </a:ext>
+            </a:extLst>
+          </p:cNvPr>
+          <p:cNvSpPr>
+            <a:spLocks xmlns:a="http://schemas.openxmlformats.org/drawingml/2006/main" noGrp="1"/>
+          </p:cNvSpPr>
+          <p:nvPr/>
+        </p:nvSpPr>
+        <p:spPr>
+          <a:xfrm xmlns:a="http://schemas.openxmlformats.org/drawingml/2006/main">
+            <a:off x="1714500" y="4181475"/>
+            <a:ext cx="9334500" cy="9525"/>
+          </a:xfrm>
+          <a:prstGeom xmlns:a="http://schemas.openxmlformats.org/drawingml/2006/main" prst="rect">
             <a:avLst/>
           </a:prstGeom>
           <a:solidFill xmlns:a="http://schemas.openxmlformats.org/drawingml/2006/main">
-            <a:srgbClr val="2C6E73"/>
+            <a:srgbClr val="D9E0E6"/>
           </a:solidFill>
           <a:ln xmlns:a="http://schemas.openxmlformats.org/drawingml/2006/main" w="0">
-            <a:noFill/>
+            <a:solidFill>
+              <a:srgbClr val="D9E0E6"/>
+            </a:solidFill>
           </a:ln>
         </p:spPr>
       </p:sp>
@@ -8729,19 +8737,19 @@
           <p:cNvPr id="21" name="">
             <a:extLst xmlns:a="http://schemas.openxmlformats.org/drawingml/2006/main">
               <a:ext uri="{FF2B5EF4-FFF2-40B4-BE49-F238E27FC236}">
-                <a16:creationId xmlns:a16="http://schemas.microsoft.com/office/drawing/2014/main" id="{2B45881C-0D5C-494C-A24B-A69E7367D6AC}"/>
-              </a:ext>
-            </a:extLst>
-          </p:cNvPr>
-          <p:cNvSpPr>
-            <a:spLocks xmlns:a="http://schemas.openxmlformats.org/drawingml/2006/main" noGrp="1"/>
-          </p:cNvSpPr>
-          <p:nvPr/>
-        </p:nvSpPr>
-        <p:spPr>
-          <a:xfrm xmlns:a="http://schemas.openxmlformats.org/drawingml/2006/main">
-            <a:off x="1000125" y="4505325"/>
-            <a:ext cx="476250" cy="419100"/>
+                <a16:creationId xmlns:a16="http://schemas.microsoft.com/office/drawing/2014/main" id="{E9829B1A-96A6-4280-97D8-ECDDAD76F25C}"/>
+              </a:ext>
+            </a:extLst>
+          </p:cNvPr>
+          <p:cNvSpPr>
+            <a:spLocks xmlns:a="http://schemas.openxmlformats.org/drawingml/2006/main" noGrp="1"/>
+          </p:cNvSpPr>
+          <p:nvPr/>
+        </p:nvSpPr>
+        <p:spPr>
+          <a:xfrm xmlns:a="http://schemas.openxmlformats.org/drawingml/2006/main">
+            <a:off x="1162050" y="4314825"/>
+            <a:ext cx="400050" cy="400050"/>
           </a:xfrm>
           <a:prstGeom xmlns:a="http://schemas.openxmlformats.org/drawingml/2006/main" prst="rect">
             <a:avLst/>
@@ -8758,9 +8766,9 @@
           <a:lstStyle xmlns:a="http://schemas.openxmlformats.org/drawingml/2006/main"/>
           <a:p xmlns:a="http://schemas.openxmlformats.org/drawingml/2006/main">
             <a:pPr algn="ctr">
-              <a:defRPr sz="1350" b="1">
-                <a:solidFill>
-                  <a:srgbClr val="FFFFFF"/>
+              <a:defRPr sz="1125" b="1">
+                <a:solidFill>
+                  <a:srgbClr val="2C6E73"/>
                 </a:solidFill>
                 <a:latin typeface="Arial"/>
                 <a:ea typeface="Arial"/>
@@ -8768,9 +8776,9 @@
               </a:defRPr>
             </a:pPr>
             <a:r>
-              <a:rPr sz="1350" b="1">
-                <a:solidFill>
-                  <a:srgbClr val="FFFFFF"/>
+              <a:rPr sz="1125" b="1">
+                <a:solidFill>
+                  <a:srgbClr val="2C6E73"/>
                 </a:solidFill>
                 <a:latin typeface="Arial"/>
                 <a:ea typeface="Arial"/>
@@ -8786,19 +8794,19 @@
           <p:cNvPr id="22" name="">
             <a:extLst xmlns:a="http://schemas.openxmlformats.org/drawingml/2006/main">
               <a:ext uri="{FF2B5EF4-FFF2-40B4-BE49-F238E27FC236}">
-                <a16:creationId xmlns:a16="http://schemas.microsoft.com/office/drawing/2014/main" id="{8A1B83A2-B38A-43C7-B8E1-C47BCD534162}"/>
-              </a:ext>
-            </a:extLst>
-          </p:cNvPr>
-          <p:cNvSpPr>
-            <a:spLocks xmlns:a="http://schemas.openxmlformats.org/drawingml/2006/main" noGrp="1"/>
-          </p:cNvSpPr>
-          <p:nvPr/>
-        </p:nvSpPr>
-        <p:spPr>
-          <a:xfrm xmlns:a="http://schemas.openxmlformats.org/drawingml/2006/main">
-            <a:off x="1714500" y="4410075"/>
-            <a:ext cx="9429750" cy="609600"/>
+                <a16:creationId xmlns:a16="http://schemas.microsoft.com/office/drawing/2014/main" id="{0286BC16-BF2C-4869-B771-A47E7A98162C}"/>
+              </a:ext>
+            </a:extLst>
+          </p:cNvPr>
+          <p:cNvSpPr>
+            <a:spLocks xmlns:a="http://schemas.openxmlformats.org/drawingml/2006/main" noGrp="1"/>
+          </p:cNvSpPr>
+          <p:nvPr/>
+        </p:nvSpPr>
+        <p:spPr>
+          <a:xfrm xmlns:a="http://schemas.openxmlformats.org/drawingml/2006/main">
+            <a:off x="1714500" y="4229100"/>
+            <a:ext cx="9525000" cy="638175"/>
           </a:xfrm>
           <a:prstGeom xmlns:a="http://schemas.openxmlformats.org/drawingml/2006/main" prst="rect">
             <a:avLst/>
@@ -8815,9 +8823,9 @@
           <a:lstStyle xmlns:a="http://schemas.openxmlformats.org/drawingml/2006/main"/>
           <a:p xmlns:a="http://schemas.openxmlformats.org/drawingml/2006/main">
             <a:pPr algn="l">
-              <a:defRPr sz="1500" b="1">
-                <a:solidFill>
-                  <a:srgbClr val="2F785D"/>
+              <a:defRPr sz="1575" b="0">
+                <a:solidFill>
+                  <a:srgbClr val="17253A"/>
                 </a:solidFill>
                 <a:latin typeface="Arial"/>
                 <a:ea typeface="Arial"/>
@@ -8825,15 +8833,161 @@
               </a:defRPr>
             </a:pPr>
             <a:r>
-              <a:rPr sz="1500" b="1">
+              <a:rPr sz="1575" b="0">
+                <a:solidFill>
+                  <a:srgbClr val="17253A"/>
+                </a:solidFill>
+                <a:latin typeface="Arial"/>
+                <a:ea typeface="Arial"/>
+                <a:cs typeface="Arial"/>
+              </a:rPr>
+              <a:t>n = 12 - 5</a:t>
+            </a:r>
+          </a:p>
+        </p:txBody>
+      </p:sp>
+      <p:sp>
+        <p:nvSpPr>
+          <p:cNvPr id="23" name="">
+            <a:extLst xmlns:a="http://schemas.openxmlformats.org/drawingml/2006/main">
+              <a:ext uri="{FF2B5EF4-FFF2-40B4-BE49-F238E27FC236}">
+                <a16:creationId xmlns:a16="http://schemas.microsoft.com/office/drawing/2014/main" id="{8E269BBE-9913-4B49-B6D3-577159081224}"/>
+              </a:ext>
+            </a:extLst>
+          </p:cNvPr>
+          <p:cNvSpPr>
+            <a:spLocks xmlns:a="http://schemas.openxmlformats.org/drawingml/2006/main" noGrp="1"/>
+          </p:cNvSpPr>
+          <p:nvPr/>
+        </p:nvSpPr>
+        <p:spPr>
+          <a:xfrm xmlns:a="http://schemas.openxmlformats.org/drawingml/2006/main">
+            <a:off x="1714500" y="4886325"/>
+            <a:ext cx="9334500" cy="9525"/>
+          </a:xfrm>
+          <a:prstGeom xmlns:a="http://schemas.openxmlformats.org/drawingml/2006/main" prst="rect">
+            <a:avLst/>
+          </a:prstGeom>
+          <a:solidFill xmlns:a="http://schemas.openxmlformats.org/drawingml/2006/main">
+            <a:srgbClr val="D9E0E6"/>
+          </a:solidFill>
+          <a:ln xmlns:a="http://schemas.openxmlformats.org/drawingml/2006/main" w="0">
+            <a:solidFill>
+              <a:srgbClr val="D9E0E6"/>
+            </a:solidFill>
+          </a:ln>
+        </p:spPr>
+      </p:sp>
+      <p:sp>
+        <p:nvSpPr>
+          <p:cNvPr id="24" name="">
+            <a:extLst xmlns:a="http://schemas.openxmlformats.org/drawingml/2006/main">
+              <a:ext uri="{FF2B5EF4-FFF2-40B4-BE49-F238E27FC236}">
+                <a16:creationId xmlns:a16="http://schemas.microsoft.com/office/drawing/2014/main" id="{E577F7AD-B2E4-46D5-9B12-FCA46286B245}"/>
+              </a:ext>
+            </a:extLst>
+          </p:cNvPr>
+          <p:cNvSpPr>
+            <a:spLocks xmlns:a="http://schemas.openxmlformats.org/drawingml/2006/main" noGrp="1"/>
+          </p:cNvSpPr>
+          <p:nvPr/>
+        </p:nvSpPr>
+        <p:spPr>
+          <a:xfrm xmlns:a="http://schemas.openxmlformats.org/drawingml/2006/main">
+            <a:off x="1162050" y="5019675"/>
+            <a:ext cx="400050" cy="400050"/>
+          </a:xfrm>
+          <a:prstGeom xmlns:a="http://schemas.openxmlformats.org/drawingml/2006/main" prst="rect">
+            <a:avLst/>
+          </a:prstGeom>
+          <a:noFill xmlns:a="http://schemas.openxmlformats.org/drawingml/2006/main"/>
+          <a:ln xmlns:a="http://schemas.openxmlformats.org/drawingml/2006/main" w="0">
+            <a:noFill/>
+          </a:ln>
+        </p:spPr>
+        <p:txBody>
+          <a:bodyPr xmlns:a="http://schemas.openxmlformats.org/drawingml/2006/main" anchor="ctr">
+            <a:normAutofit fontScale="100000"/>
+          </a:bodyPr>
+          <a:lstStyle xmlns:a="http://schemas.openxmlformats.org/drawingml/2006/main"/>
+          <a:p xmlns:a="http://schemas.openxmlformats.org/drawingml/2006/main">
+            <a:pPr algn="ctr">
+              <a:defRPr sz="1125" b="1">
                 <a:solidFill>
                   <a:srgbClr val="2F785D"/>
                 </a:solidFill>
                 <a:latin typeface="Arial"/>
                 <a:ea typeface="Arial"/>
                 <a:cs typeface="Arial"/>
+              </a:defRPr>
+            </a:pPr>
+            <a:r>
+              <a:rPr sz="1125" b="1">
+                <a:solidFill>
+                  <a:srgbClr val="2F785D"/>
+                </a:solidFill>
+                <a:latin typeface="Arial"/>
+                <a:ea typeface="Arial"/>
+                <a:cs typeface="Arial"/>
               </a:rPr>
-              <a:t>Check the result: Check by estimating or comparing with an equivalent expression.</a:t>
+              <a:t>5</a:t>
+            </a:r>
+          </a:p>
+        </p:txBody>
+      </p:sp>
+      <p:sp>
+        <p:nvSpPr>
+          <p:cNvPr id="25" name="">
+            <a:extLst xmlns:a="http://schemas.openxmlformats.org/drawingml/2006/main">
+              <a:ext uri="{FF2B5EF4-FFF2-40B4-BE49-F238E27FC236}">
+                <a16:creationId xmlns:a16="http://schemas.microsoft.com/office/drawing/2014/main" id="{F3768BD7-9D34-41EC-A8D4-C72437C32AEA}"/>
+              </a:ext>
+            </a:extLst>
+          </p:cNvPr>
+          <p:cNvSpPr>
+            <a:spLocks xmlns:a="http://schemas.openxmlformats.org/drawingml/2006/main" noGrp="1"/>
+          </p:cNvSpPr>
+          <p:nvPr/>
+        </p:nvSpPr>
+        <p:spPr>
+          <a:xfrm xmlns:a="http://schemas.openxmlformats.org/drawingml/2006/main">
+            <a:off x="1714500" y="4933950"/>
+            <a:ext cx="9525000" cy="638175"/>
+          </a:xfrm>
+          <a:prstGeom xmlns:a="http://schemas.openxmlformats.org/drawingml/2006/main" prst="rect">
+            <a:avLst/>
+          </a:prstGeom>
+          <a:noFill xmlns:a="http://schemas.openxmlformats.org/drawingml/2006/main"/>
+          <a:ln xmlns:a="http://schemas.openxmlformats.org/drawingml/2006/main" w="0">
+            <a:noFill/>
+          </a:ln>
+        </p:spPr>
+        <p:txBody>
+          <a:bodyPr xmlns:a="http://schemas.openxmlformats.org/drawingml/2006/main" anchor="ctr">
+            <a:normAutofit fontScale="100000"/>
+          </a:bodyPr>
+          <a:lstStyle xmlns:a="http://schemas.openxmlformats.org/drawingml/2006/main"/>
+          <a:p xmlns:a="http://schemas.openxmlformats.org/drawingml/2006/main">
+            <a:pPr algn="l">
+              <a:defRPr sz="1575" b="1">
+                <a:solidFill>
+                  <a:srgbClr val="2F785D"/>
+                </a:solidFill>
+                <a:latin typeface="Arial"/>
+                <a:ea typeface="Arial"/>
+                <a:cs typeface="Arial"/>
+              </a:defRPr>
+            </a:pPr>
+            <a:r>
+              <a:rPr sz="1575" b="1">
+                <a:solidFill>
+                  <a:srgbClr val="2F785D"/>
+                </a:solidFill>
+                <a:latin typeface="Arial"/>
+                <a:ea typeface="Arial"/>
+                <a:cs typeface="Arial"/>
+              </a:rPr>
+              <a:t>n = 7</a:t>
             </a:r>
           </a:p>
         </p:txBody>
@@ -8841,7 +8995,7 @@
     </p:spTree>
     <p:extLst>
       <p:ext uri="{BB962C8B-B14F-4D97-AF65-F5344CB8AC3E}">
-        <p14:creationId xmlns:p14="http://schemas.microsoft.com/office/powerpoint/2010/main" val="331971324"/>
+        <p14:creationId xmlns:p14="http://schemas.microsoft.com/office/powerpoint/2010/main" val="1382490185"/>
       </p:ext>
     </p:extLst>
   </p:cSld>
@@ -9078,6 +9232,51 @@
                       </p:childTnLst>
                     </p:cTn>
                   </p:par>
+                  <p:par>
+                    <p:cTn id="23" fill="hold">
+                      <p:stCondLst>
+                        <p:cond delay="indefinite"/>
+                      </p:stCondLst>
+                      <p:childTnLst>
+                        <p:par>
+                          <p:cTn id="24" fill="hold">
+                            <p:stCondLst>
+                              <p:cond delay="0"/>
+                            </p:stCondLst>
+                            <p:childTnLst>
+                              <p:par>
+                                <p:cTn id="25" presetID="1" presetClass="entr" presetSubtype="0" fill="hold" grpId="0" nodeType="clickEffect">
+                                  <p:stCondLst>
+                                    <p:cond delay="0"/>
+                                  </p:stCondLst>
+                                  <p:childTnLst>
+                                    <p:set>
+                                      <p:cBhvr>
+                                        <p:cTn id="26" dur="1" fill="hold">
+                                          <p:stCondLst>
+                                            <p:cond delay="0"/>
+                                          </p:stCondLst>
+                                        </p:cTn>
+                                        <p:tgtEl>
+                                          <p:spTgt spid="25"/>
+                                        </p:tgtEl>
+                                        <p:attrNameLst>
+                                          <p:attrName>style.visibility</p:attrName>
+                                        </p:attrNameLst>
+                                      </p:cBhvr>
+                                      <p:to>
+                                        <p:strVal val="visible"/>
+                                      </p:to>
+                                    </p:set>
+                                  </p:childTnLst>
+                                </p:cTn>
+                              </p:par>
+                            </p:childTnLst>
+                          </p:cTn>
+                        </p:par>
+                      </p:childTnLst>
+                    </p:cTn>
+                  </p:par>
                 </p:childTnLst>
               </p:cTn>
               <p:prevCondLst>
@@ -9105,6 +9304,7 @@
       <p:bldP spid="16" grpId="0"/>
       <p:bldP spid="19" grpId="0"/>
       <p:bldP spid="22" grpId="0"/>
+      <p:bldP spid="25" grpId="0"/>
     </p:bldLst>
   </p:timing>
 </p:sld>
@@ -9134,7 +9334,7 @@
           <p:cNvPr id="15" name="">
             <a:extLst xmlns:a="http://schemas.openxmlformats.org/drawingml/2006/main">
               <a:ext uri="{FF2B5EF4-FFF2-40B4-BE49-F238E27FC236}">
-                <a16:creationId xmlns:a16="http://schemas.microsoft.com/office/drawing/2014/main" id="{CD102BD9-CA03-41E1-A2F7-3D1FE7E4262E}"/>
+                <a16:creationId xmlns:a16="http://schemas.microsoft.com/office/drawing/2014/main" id="{36AA4C52-33C2-493B-BF7A-18BB678369CF}"/>
               </a:ext>
             </a:extLst>
           </p:cNvPr>
@@ -9166,7 +9366,7 @@
           <p:cNvPr id="2" name="">
             <a:extLst xmlns:a="http://schemas.openxmlformats.org/drawingml/2006/main">
               <a:ext uri="{FF2B5EF4-FFF2-40B4-BE49-F238E27FC236}">
-                <a16:creationId xmlns:a16="http://schemas.microsoft.com/office/drawing/2014/main" id="{9A6AE691-821B-4757-8574-321971635E59}"/>
+                <a16:creationId xmlns:a16="http://schemas.microsoft.com/office/drawing/2014/main" id="{8DEC1228-2B06-4683-A2EB-45998E10303B}"/>
               </a:ext>
             </a:extLst>
           </p:cNvPr>
@@ -9223,7 +9423,7 @@
           <p:cNvPr id="3" name="">
             <a:extLst xmlns:a="http://schemas.openxmlformats.org/drawingml/2006/main">
               <a:ext uri="{FF2B5EF4-FFF2-40B4-BE49-F238E27FC236}">
-                <a16:creationId xmlns:a16="http://schemas.microsoft.com/office/drawing/2014/main" id="{D66DDAC4-5D54-4F2C-B9E1-1A5F9BCA5C35}"/>
+                <a16:creationId xmlns:a16="http://schemas.microsoft.com/office/drawing/2014/main" id="{EDD6597B-E48D-43CD-B093-A2E9B34934AE}"/>
               </a:ext>
             </a:extLst>
           </p:cNvPr>
@@ -9255,7 +9455,7 @@
           <p:cNvPr id="4" name="">
             <a:extLst xmlns:a="http://schemas.openxmlformats.org/drawingml/2006/main">
               <a:ext uri="{FF2B5EF4-FFF2-40B4-BE49-F238E27FC236}">
-                <a16:creationId xmlns:a16="http://schemas.microsoft.com/office/drawing/2014/main" id="{6DACC93D-BC44-43D0-B9AF-830ECFB085E8}"/>
+                <a16:creationId xmlns:a16="http://schemas.microsoft.com/office/drawing/2014/main" id="{023F492E-806A-4059-8A58-B2FD3CDA6285}"/>
               </a:ext>
             </a:extLst>
           </p:cNvPr>
@@ -9312,7 +9512,7 @@
           <p:cNvPr id="5" name="">
             <a:extLst xmlns:a="http://schemas.openxmlformats.org/drawingml/2006/main">
               <a:ext uri="{FF2B5EF4-FFF2-40B4-BE49-F238E27FC236}">
-                <a16:creationId xmlns:a16="http://schemas.microsoft.com/office/drawing/2014/main" id="{D27E6EA0-A2E4-4425-BAA7-9087AB18A90E}"/>
+                <a16:creationId xmlns:a16="http://schemas.microsoft.com/office/drawing/2014/main" id="{1EA3E0AF-7E4D-4BF6-8F4F-155036DF6643}"/>
               </a:ext>
             </a:extLst>
           </p:cNvPr>
@@ -9369,7 +9569,7 @@
           <p:cNvPr id="6" name="">
             <a:extLst xmlns:a="http://schemas.openxmlformats.org/drawingml/2006/main">
               <a:ext uri="{FF2B5EF4-FFF2-40B4-BE49-F238E27FC236}">
-                <a16:creationId xmlns:a16="http://schemas.microsoft.com/office/drawing/2014/main" id="{42BBDFEF-037E-40A8-ADAE-5E776876CBD0}"/>
+                <a16:creationId xmlns:a16="http://schemas.microsoft.com/office/drawing/2014/main" id="{97EC265A-E8B6-47EB-8F2F-5E55333A749F}"/>
               </a:ext>
             </a:extLst>
           </p:cNvPr>
@@ -9426,7 +9626,7 @@
           <p:cNvPr id="7" name="">
             <a:extLst xmlns:a="http://schemas.openxmlformats.org/drawingml/2006/main">
               <a:ext uri="{FF2B5EF4-FFF2-40B4-BE49-F238E27FC236}">
-                <a16:creationId xmlns:a16="http://schemas.microsoft.com/office/drawing/2014/main" id="{7450623E-5384-48DA-A7D1-D345D4C161BE}"/>
+                <a16:creationId xmlns:a16="http://schemas.microsoft.com/office/drawing/2014/main" id="{B7BCE50A-A58A-4437-B85A-8116238E2A46}"/>
               </a:ext>
             </a:extLst>
           </p:cNvPr>
@@ -9458,7 +9658,7 @@
           <p:cNvPr id="8" name="">
             <a:extLst xmlns:a="http://schemas.openxmlformats.org/drawingml/2006/main">
               <a:ext uri="{FF2B5EF4-FFF2-40B4-BE49-F238E27FC236}">
-                <a16:creationId xmlns:a16="http://schemas.microsoft.com/office/drawing/2014/main" id="{C27AB625-51A0-4E33-8370-21622615BCFB}"/>
+                <a16:creationId xmlns:a16="http://schemas.microsoft.com/office/drawing/2014/main" id="{138BAE92-C8BB-4AF2-B0BB-5D28131A97F1}"/>
               </a:ext>
             </a:extLst>
           </p:cNvPr>
@@ -9515,7 +9715,7 @@
           <p:cNvPr id="9" name="">
             <a:extLst xmlns:a="http://schemas.openxmlformats.org/drawingml/2006/main">
               <a:ext uri="{FF2B5EF4-FFF2-40B4-BE49-F238E27FC236}">
-                <a16:creationId xmlns:a16="http://schemas.microsoft.com/office/drawing/2014/main" id="{D4BB59FC-D6F9-4B37-8A69-CC90BC6CC73A}"/>
+                <a16:creationId xmlns:a16="http://schemas.microsoft.com/office/drawing/2014/main" id="{ABDF92BC-D80F-4137-AC2D-2454BA2F1B30}"/>
               </a:ext>
             </a:extLst>
           </p:cNvPr>
@@ -9572,7 +9772,7 @@
           <p:cNvPr id="10" name="">
             <a:extLst xmlns:a="http://schemas.openxmlformats.org/drawingml/2006/main">
               <a:ext uri="{FF2B5EF4-FFF2-40B4-BE49-F238E27FC236}">
-                <a16:creationId xmlns:a16="http://schemas.microsoft.com/office/drawing/2014/main" id="{AF824F94-1656-4D84-8AC8-72C2E1E02CA7}"/>
+                <a16:creationId xmlns:a16="http://schemas.microsoft.com/office/drawing/2014/main" id="{A0F6D85A-A788-456D-A6C7-341BDE2E20E4}"/>
               </a:ext>
             </a:extLst>
           </p:cNvPr>
@@ -9629,7 +9829,7 @@
           <p:cNvPr id="11" name="">
             <a:extLst xmlns:a="http://schemas.openxmlformats.org/drawingml/2006/main">
               <a:ext uri="{FF2B5EF4-FFF2-40B4-BE49-F238E27FC236}">
-                <a16:creationId xmlns:a16="http://schemas.microsoft.com/office/drawing/2014/main" id="{59CAE930-677E-493A-9BF1-617E01DDBB31}"/>
+                <a16:creationId xmlns:a16="http://schemas.microsoft.com/office/drawing/2014/main" id="{60467BE9-598C-45F4-A997-C458D14ADEC5}"/>
               </a:ext>
             </a:extLst>
           </p:cNvPr>
@@ -9686,7 +9886,7 @@
           <p:cNvPr id="12" name="">
             <a:extLst xmlns:a="http://schemas.openxmlformats.org/drawingml/2006/main">
               <a:ext uri="{FF2B5EF4-FFF2-40B4-BE49-F238E27FC236}">
-                <a16:creationId xmlns:a16="http://schemas.microsoft.com/office/drawing/2014/main" id="{0F2FFD15-710A-4D6D-9137-73FF9509DABC}"/>
+                <a16:creationId xmlns:a16="http://schemas.microsoft.com/office/drawing/2014/main" id="{50D26DB0-2B60-425C-8AD6-60E1343808DC}"/>
               </a:ext>
             </a:extLst>
           </p:cNvPr>
@@ -9718,7 +9918,7 @@
           <p:cNvPr id="13" name="">
             <a:extLst xmlns:a="http://schemas.openxmlformats.org/drawingml/2006/main">
               <a:ext uri="{FF2B5EF4-FFF2-40B4-BE49-F238E27FC236}">
-                <a16:creationId xmlns:a16="http://schemas.microsoft.com/office/drawing/2014/main" id="{C653AD54-903E-4EE1-8E81-94A339BCDD66}"/>
+                <a16:creationId xmlns:a16="http://schemas.microsoft.com/office/drawing/2014/main" id="{4D8D087D-5E70-45DD-AAFD-6C247937DF84}"/>
               </a:ext>
             </a:extLst>
           </p:cNvPr>
@@ -9775,7 +9975,7 @@
           <p:cNvPr id="14" name="">
             <a:extLst xmlns:a="http://schemas.openxmlformats.org/drawingml/2006/main">
               <a:ext uri="{FF2B5EF4-FFF2-40B4-BE49-F238E27FC236}">
-                <a16:creationId xmlns:a16="http://schemas.microsoft.com/office/drawing/2014/main" id="{0008B3EC-41F2-4D9B-B254-E38A3A788564}"/>
+                <a16:creationId xmlns:a16="http://schemas.microsoft.com/office/drawing/2014/main" id="{FB54DB8E-56BB-4A95-8957-AE5BE294EEF0}"/>
               </a:ext>
             </a:extLst>
           </p:cNvPr>
@@ -9830,7 +10030,7 @@
     </p:spTree>
     <p:extLst>
       <p:ext uri="{BB962C8B-B14F-4D97-AF65-F5344CB8AC3E}">
-        <p14:creationId xmlns:p14="http://schemas.microsoft.com/office/powerpoint/2010/main" val="1019213497"/>
+        <p14:creationId xmlns:p14="http://schemas.microsoft.com/office/powerpoint/2010/main" val="83122429"/>
       </p:ext>
     </p:extLst>
   </p:cSld>
@@ -10031,7 +10231,7 @@
           <p:cNvPr id="16" name="">
             <a:extLst xmlns:a="http://schemas.openxmlformats.org/drawingml/2006/main">
               <a:ext uri="{FF2B5EF4-FFF2-40B4-BE49-F238E27FC236}">
-                <a16:creationId xmlns:a16="http://schemas.microsoft.com/office/drawing/2014/main" id="{D377EFE4-E7B0-47DF-A8E0-B209059CAEC0}"/>
+                <a16:creationId xmlns:a16="http://schemas.microsoft.com/office/drawing/2014/main" id="{E6FE4A8C-61C4-4781-A728-9E6A44F5D8C7}"/>
               </a:ext>
             </a:extLst>
           </p:cNvPr>
@@ -10063,7 +10263,7 @@
           <p:cNvPr id="2" name="">
             <a:extLst xmlns:a="http://schemas.openxmlformats.org/drawingml/2006/main">
               <a:ext uri="{FF2B5EF4-FFF2-40B4-BE49-F238E27FC236}">
-                <a16:creationId xmlns:a16="http://schemas.microsoft.com/office/drawing/2014/main" id="{599F481F-7975-4DA6-AF39-908733CFAC26}"/>
+                <a16:creationId xmlns:a16="http://schemas.microsoft.com/office/drawing/2014/main" id="{438409D6-C6C6-4F10-BA2E-9D84CAA78052}"/>
               </a:ext>
             </a:extLst>
           </p:cNvPr>
@@ -10120,7 +10320,7 @@
           <p:cNvPr id="3" name="">
             <a:extLst xmlns:a="http://schemas.openxmlformats.org/drawingml/2006/main">
               <a:ext uri="{FF2B5EF4-FFF2-40B4-BE49-F238E27FC236}">
-                <a16:creationId xmlns:a16="http://schemas.microsoft.com/office/drawing/2014/main" id="{DEAB9622-8D1C-404F-B718-D56B677460D1}"/>
+                <a16:creationId xmlns:a16="http://schemas.microsoft.com/office/drawing/2014/main" id="{D7DCADAC-F4B0-450C-895A-74C651C8F9BD}"/>
               </a:ext>
             </a:extLst>
           </p:cNvPr>
@@ -10152,7 +10352,7 @@
           <p:cNvPr id="4" name="">
             <a:extLst xmlns:a="http://schemas.openxmlformats.org/drawingml/2006/main">
               <a:ext uri="{FF2B5EF4-FFF2-40B4-BE49-F238E27FC236}">
-                <a16:creationId xmlns:a16="http://schemas.microsoft.com/office/drawing/2014/main" id="{A4CD19B8-AFD9-4403-BE44-094A276528B3}"/>
+                <a16:creationId xmlns:a16="http://schemas.microsoft.com/office/drawing/2014/main" id="{4AB50FA1-9ADC-47A9-B670-ED7C4C53DA76}"/>
               </a:ext>
             </a:extLst>
           </p:cNvPr>
@@ -10209,7 +10409,7 @@
           <p:cNvPr id="5" name="">
             <a:extLst xmlns:a="http://schemas.openxmlformats.org/drawingml/2006/main">
               <a:ext uri="{FF2B5EF4-FFF2-40B4-BE49-F238E27FC236}">
-                <a16:creationId xmlns:a16="http://schemas.microsoft.com/office/drawing/2014/main" id="{8E125184-FA56-4BC5-A360-F8A547A0B69B}"/>
+                <a16:creationId xmlns:a16="http://schemas.microsoft.com/office/drawing/2014/main" id="{EFAB5D11-5FE1-40D5-ABF7-7BC0668B8D61}"/>
               </a:ext>
             </a:extLst>
           </p:cNvPr>
@@ -10266,7 +10466,7 @@
           <p:cNvPr id="6" name="">
             <a:extLst xmlns:a="http://schemas.openxmlformats.org/drawingml/2006/main">
               <a:ext uri="{FF2B5EF4-FFF2-40B4-BE49-F238E27FC236}">
-                <a16:creationId xmlns:a16="http://schemas.microsoft.com/office/drawing/2014/main" id="{AD2AB208-C272-45D6-8E17-0205B57A38EA}"/>
+                <a16:creationId xmlns:a16="http://schemas.microsoft.com/office/drawing/2014/main" id="{9515E7BA-45E8-4A72-8136-C9CEB68CC730}"/>
               </a:ext>
             </a:extLst>
           </p:cNvPr>
@@ -10323,7 +10523,7 @@
           <p:cNvPr id="7" name="">
             <a:extLst xmlns:a="http://schemas.openxmlformats.org/drawingml/2006/main">
               <a:ext uri="{FF2B5EF4-FFF2-40B4-BE49-F238E27FC236}">
-                <a16:creationId xmlns:a16="http://schemas.microsoft.com/office/drawing/2014/main" id="{F7E4337B-CC0B-4CE3-8A53-8EB03960FB64}"/>
+                <a16:creationId xmlns:a16="http://schemas.microsoft.com/office/drawing/2014/main" id="{00B088A0-F6D1-4549-9B1E-F7EA7ABEE149}"/>
               </a:ext>
             </a:extLst>
           </p:cNvPr>
@@ -10355,7 +10555,7 @@
           <p:cNvPr id="8" name="">
             <a:extLst xmlns:a="http://schemas.openxmlformats.org/drawingml/2006/main">
               <a:ext uri="{FF2B5EF4-FFF2-40B4-BE49-F238E27FC236}">
-                <a16:creationId xmlns:a16="http://schemas.microsoft.com/office/drawing/2014/main" id="{4D4BCA4C-6494-4F84-BC2B-C6372C3DD92B}"/>
+                <a16:creationId xmlns:a16="http://schemas.microsoft.com/office/drawing/2014/main" id="{3C68B993-C5C7-45C2-B863-3FA263C8D040}"/>
               </a:ext>
             </a:extLst>
           </p:cNvPr>
@@ -10412,7 +10612,7 @@
           <p:cNvPr id="9" name="">
             <a:extLst xmlns:a="http://schemas.openxmlformats.org/drawingml/2006/main">
               <a:ext uri="{FF2B5EF4-FFF2-40B4-BE49-F238E27FC236}">
-                <a16:creationId xmlns:a16="http://schemas.microsoft.com/office/drawing/2014/main" id="{DAD01094-BF47-4DDE-A268-4EE3F0B6581B}"/>
+                <a16:creationId xmlns:a16="http://schemas.microsoft.com/office/drawing/2014/main" id="{9F2C2717-D276-49EC-A06C-E535273CE4F1}"/>
               </a:ext>
             </a:extLst>
           </p:cNvPr>
@@ -10469,7 +10669,7 @@
           <p:cNvPr id="10" name="">
             <a:extLst xmlns:a="http://schemas.openxmlformats.org/drawingml/2006/main">
               <a:ext uri="{FF2B5EF4-FFF2-40B4-BE49-F238E27FC236}">
-                <a16:creationId xmlns:a16="http://schemas.microsoft.com/office/drawing/2014/main" id="{ACCF4964-EA78-4994-A893-356885986CC2}"/>
+                <a16:creationId xmlns:a16="http://schemas.microsoft.com/office/drawing/2014/main" id="{BF13FC31-5A10-4446-8CA1-1652782DF6C1}"/>
               </a:ext>
             </a:extLst>
           </p:cNvPr>
@@ -10526,7 +10726,7 @@
           <p:cNvPr id="11" name="">
             <a:extLst xmlns:a="http://schemas.openxmlformats.org/drawingml/2006/main">
               <a:ext uri="{FF2B5EF4-FFF2-40B4-BE49-F238E27FC236}">
-                <a16:creationId xmlns:a16="http://schemas.microsoft.com/office/drawing/2014/main" id="{930E25E4-FF77-4E1E-AB21-DF0BA7DB26B8}"/>
+                <a16:creationId xmlns:a16="http://schemas.microsoft.com/office/drawing/2014/main" id="{9EB43E5E-EC42-4028-8D7C-351063A3AB2B}"/>
               </a:ext>
             </a:extLst>
           </p:cNvPr>
@@ -10583,7 +10783,7 @@
           <p:cNvPr id="12" name="">
             <a:extLst xmlns:a="http://schemas.openxmlformats.org/drawingml/2006/main">
               <a:ext uri="{FF2B5EF4-FFF2-40B4-BE49-F238E27FC236}">
-                <a16:creationId xmlns:a16="http://schemas.microsoft.com/office/drawing/2014/main" id="{9D898B70-A33C-4CA5-96F4-8714F7F1B6FE}"/>
+                <a16:creationId xmlns:a16="http://schemas.microsoft.com/office/drawing/2014/main" id="{79986C51-D223-4D1D-BE14-D62C01360A47}"/>
               </a:ext>
             </a:extLst>
           </p:cNvPr>
@@ -10640,7 +10840,7 @@
           <p:cNvPr id="13" name="">
             <a:extLst xmlns:a="http://schemas.openxmlformats.org/drawingml/2006/main">
               <a:ext uri="{FF2B5EF4-FFF2-40B4-BE49-F238E27FC236}">
-                <a16:creationId xmlns:a16="http://schemas.microsoft.com/office/drawing/2014/main" id="{DBFA9B01-024C-4533-BD37-47CEB4445642}"/>
+                <a16:creationId xmlns:a16="http://schemas.microsoft.com/office/drawing/2014/main" id="{DE5734A5-A75D-423F-A8E8-71F763413745}"/>
               </a:ext>
             </a:extLst>
           </p:cNvPr>
@@ -10697,7 +10897,7 @@
           <p:cNvPr id="14" name="">
             <a:extLst xmlns:a="http://schemas.openxmlformats.org/drawingml/2006/main">
               <a:ext uri="{FF2B5EF4-FFF2-40B4-BE49-F238E27FC236}">
-                <a16:creationId xmlns:a16="http://schemas.microsoft.com/office/drawing/2014/main" id="{03A032B8-4AF1-4251-96C3-431AE6E0BDB4}"/>
+                <a16:creationId xmlns:a16="http://schemas.microsoft.com/office/drawing/2014/main" id="{F94A1EFC-BE9D-451F-9686-D4E811F7E33D}"/>
               </a:ext>
             </a:extLst>
           </p:cNvPr>
@@ -10754,7 +10954,7 @@
           <p:cNvPr id="15" name="">
             <a:extLst xmlns:a="http://schemas.openxmlformats.org/drawingml/2006/main">
               <a:ext uri="{FF2B5EF4-FFF2-40B4-BE49-F238E27FC236}">
-                <a16:creationId xmlns:a16="http://schemas.microsoft.com/office/drawing/2014/main" id="{9D28F26C-4523-4402-BBD0-7EDA359D9132}"/>
+                <a16:creationId xmlns:a16="http://schemas.microsoft.com/office/drawing/2014/main" id="{F2170F61-0AEC-42D9-B917-96C2832867CC}"/>
               </a:ext>
             </a:extLst>
           </p:cNvPr>
@@ -10809,7 +11009,7 @@
     </p:spTree>
     <p:extLst>
       <p:ext uri="{BB962C8B-B14F-4D97-AF65-F5344CB8AC3E}">
-        <p14:creationId xmlns:p14="http://schemas.microsoft.com/office/powerpoint/2010/main" val="1294777540"/>
+        <p14:creationId xmlns:p14="http://schemas.microsoft.com/office/powerpoint/2010/main" val="952569564"/>
       </p:ext>
     </p:extLst>
   </p:cSld>
@@ -10964,7 +11164,7 @@
           <p:cNvPr id="16" name="">
             <a:extLst xmlns:a="http://schemas.openxmlformats.org/drawingml/2006/main">
               <a:ext uri="{FF2B5EF4-FFF2-40B4-BE49-F238E27FC236}">
-                <a16:creationId xmlns:a16="http://schemas.microsoft.com/office/drawing/2014/main" id="{7B4F29E6-5E19-4FF9-81CA-3F7DB4391B63}"/>
+                <a16:creationId xmlns:a16="http://schemas.microsoft.com/office/drawing/2014/main" id="{B8AE4649-3D19-4754-9E4D-4ECB48878356}"/>
               </a:ext>
             </a:extLst>
           </p:cNvPr>
@@ -10996,7 +11196,7 @@
           <p:cNvPr id="2" name="">
             <a:extLst xmlns:a="http://schemas.openxmlformats.org/drawingml/2006/main">
               <a:ext uri="{FF2B5EF4-FFF2-40B4-BE49-F238E27FC236}">
-                <a16:creationId xmlns:a16="http://schemas.microsoft.com/office/drawing/2014/main" id="{8418ABF8-74D8-4DE8-96A3-71E559EFCBEC}"/>
+                <a16:creationId xmlns:a16="http://schemas.microsoft.com/office/drawing/2014/main" id="{D9264602-7905-4AC6-ACD6-8D780E9EEAE0}"/>
               </a:ext>
             </a:extLst>
           </p:cNvPr>
@@ -11053,7 +11253,7 @@
           <p:cNvPr id="3" name="">
             <a:extLst xmlns:a="http://schemas.openxmlformats.org/drawingml/2006/main">
               <a:ext uri="{FF2B5EF4-FFF2-40B4-BE49-F238E27FC236}">
-                <a16:creationId xmlns:a16="http://schemas.microsoft.com/office/drawing/2014/main" id="{5D6B1A81-08F5-4F33-9017-3A2BC4DE43BF}"/>
+                <a16:creationId xmlns:a16="http://schemas.microsoft.com/office/drawing/2014/main" id="{AE060A51-0381-4A2B-B84E-984FA08A4F12}"/>
               </a:ext>
             </a:extLst>
           </p:cNvPr>
@@ -11085,7 +11285,7 @@
           <p:cNvPr id="4" name="">
             <a:extLst xmlns:a="http://schemas.openxmlformats.org/drawingml/2006/main">
               <a:ext uri="{FF2B5EF4-FFF2-40B4-BE49-F238E27FC236}">
-                <a16:creationId xmlns:a16="http://schemas.microsoft.com/office/drawing/2014/main" id="{226B9803-239F-4BA5-8387-CB175BE1F7B3}"/>
+                <a16:creationId xmlns:a16="http://schemas.microsoft.com/office/drawing/2014/main" id="{58F5582B-7C51-4732-B1AE-FB67E6DB4CDB}"/>
               </a:ext>
             </a:extLst>
           </p:cNvPr>
@@ -11142,7 +11342,7 @@
           <p:cNvPr id="5" name="">
             <a:extLst xmlns:a="http://schemas.openxmlformats.org/drawingml/2006/main">
               <a:ext uri="{FF2B5EF4-FFF2-40B4-BE49-F238E27FC236}">
-                <a16:creationId xmlns:a16="http://schemas.microsoft.com/office/drawing/2014/main" id="{CAA40B72-71C5-4125-BA99-E3C86CF715C0}"/>
+                <a16:creationId xmlns:a16="http://schemas.microsoft.com/office/drawing/2014/main" id="{FBA16F38-578F-4D3A-841A-A062D052D307}"/>
               </a:ext>
             </a:extLst>
           </p:cNvPr>
@@ -11199,7 +11399,7 @@
           <p:cNvPr id="6" name="">
             <a:extLst xmlns:a="http://schemas.openxmlformats.org/drawingml/2006/main">
               <a:ext uri="{FF2B5EF4-FFF2-40B4-BE49-F238E27FC236}">
-                <a16:creationId xmlns:a16="http://schemas.microsoft.com/office/drawing/2014/main" id="{4217CBF7-ED85-4B33-A307-31BB20D7428F}"/>
+                <a16:creationId xmlns:a16="http://schemas.microsoft.com/office/drawing/2014/main" id="{C6A37091-DE06-414A-B39E-B6085D550D3F}"/>
               </a:ext>
             </a:extLst>
           </p:cNvPr>
@@ -11256,7 +11456,7 @@
           <p:cNvPr id="7" name="">
             <a:extLst xmlns:a="http://schemas.openxmlformats.org/drawingml/2006/main">
               <a:ext uri="{FF2B5EF4-FFF2-40B4-BE49-F238E27FC236}">
-                <a16:creationId xmlns:a16="http://schemas.microsoft.com/office/drawing/2014/main" id="{D1D853CF-20B5-4A96-8247-B89CA3ACCFEE}"/>
+                <a16:creationId xmlns:a16="http://schemas.microsoft.com/office/drawing/2014/main" id="{E132CB3D-C887-4FEF-B813-95C3199288A5}"/>
               </a:ext>
             </a:extLst>
           </p:cNvPr>
@@ -11288,7 +11488,7 @@
           <p:cNvPr id="8" name="">
             <a:extLst xmlns:a="http://schemas.openxmlformats.org/drawingml/2006/main">
               <a:ext uri="{FF2B5EF4-FFF2-40B4-BE49-F238E27FC236}">
-                <a16:creationId xmlns:a16="http://schemas.microsoft.com/office/drawing/2014/main" id="{1B3452FB-7AF6-4E02-9656-E1E062A0C290}"/>
+                <a16:creationId xmlns:a16="http://schemas.microsoft.com/office/drawing/2014/main" id="{B165E8BE-08DE-4F3E-929D-50DEB39D6105}"/>
               </a:ext>
             </a:extLst>
           </p:cNvPr>
@@ -11345,7 +11545,7 @@
           <p:cNvPr id="9" name="">
             <a:extLst xmlns:a="http://schemas.openxmlformats.org/drawingml/2006/main">
               <a:ext uri="{FF2B5EF4-FFF2-40B4-BE49-F238E27FC236}">
-                <a16:creationId xmlns:a16="http://schemas.microsoft.com/office/drawing/2014/main" id="{B163E3E9-610D-4F3E-AB86-7DD1E8283A02}"/>
+                <a16:creationId xmlns:a16="http://schemas.microsoft.com/office/drawing/2014/main" id="{9FCBB913-85AE-4BFC-B220-C19445136C19}"/>
               </a:ext>
             </a:extLst>
           </p:cNvPr>
@@ -11406,7 +11606,7 @@
           <p:nvPr/>
         </p:nvPicPr>
         <p:blipFill>
-          <a:blip xmlns:r="http://schemas.openxmlformats.org/officeDocument/2006/relationships" xmlns:a="http://schemas.openxmlformats.org/drawingml/2006/main" r:embed="R8b5cba0d9faf4780"/>
+          <a:blip xmlns:r="http://schemas.openxmlformats.org/officeDocument/2006/relationships" xmlns:a="http://schemas.openxmlformats.org/drawingml/2006/main" r:embed="Rad50acf117244a2f"/>
           <a:stretch xmlns:a="http://schemas.openxmlformats.org/drawingml/2006/main"/>
         </p:blipFill>
         <p:spPr>
@@ -11424,7 +11624,7 @@
           <p:cNvPr id="11" name="">
             <a:extLst xmlns:a="http://schemas.openxmlformats.org/drawingml/2006/main">
               <a:ext uri="{FF2B5EF4-FFF2-40B4-BE49-F238E27FC236}">
-                <a16:creationId xmlns:a16="http://schemas.microsoft.com/office/drawing/2014/main" id="{65EE83A9-08AF-41D9-8364-2F15E3963390}"/>
+                <a16:creationId xmlns:a16="http://schemas.microsoft.com/office/drawing/2014/main" id="{3B356156-4D6B-47AB-B02C-A0C30669D3C3}"/>
               </a:ext>
             </a:extLst>
           </p:cNvPr>
@@ -11481,7 +11681,7 @@
           <p:cNvPr id="12" name="">
             <a:extLst xmlns:a="http://schemas.openxmlformats.org/drawingml/2006/main">
               <a:ext uri="{FF2B5EF4-FFF2-40B4-BE49-F238E27FC236}">
-                <a16:creationId xmlns:a16="http://schemas.microsoft.com/office/drawing/2014/main" id="{1249A188-878D-48DA-BBE1-F9D13F7A532F}"/>
+                <a16:creationId xmlns:a16="http://schemas.microsoft.com/office/drawing/2014/main" id="{7FE706A8-C7C5-413F-BBBD-8A08FEBA3A3C}"/>
               </a:ext>
             </a:extLst>
           </p:cNvPr>
@@ -11538,7 +11738,7 @@
           <p:cNvPr id="13" name="">
             <a:extLst xmlns:a="http://schemas.openxmlformats.org/drawingml/2006/main">
               <a:ext uri="{FF2B5EF4-FFF2-40B4-BE49-F238E27FC236}">
-                <a16:creationId xmlns:a16="http://schemas.microsoft.com/office/drawing/2014/main" id="{80F23463-AD93-4743-AA80-C7FED5E9DB49}"/>
+                <a16:creationId xmlns:a16="http://schemas.microsoft.com/office/drawing/2014/main" id="{32450FFF-1D5A-4FF8-9E35-10ADAB9F072A}"/>
               </a:ext>
             </a:extLst>
           </p:cNvPr>
@@ -11570,7 +11770,7 @@
           <p:cNvPr id="14" name="">
             <a:extLst xmlns:a="http://schemas.openxmlformats.org/drawingml/2006/main">
               <a:ext uri="{FF2B5EF4-FFF2-40B4-BE49-F238E27FC236}">
-                <a16:creationId xmlns:a16="http://schemas.microsoft.com/office/drawing/2014/main" id="{584AC90A-CBFE-4C69-8AE9-A049A2C3290C}"/>
+                <a16:creationId xmlns:a16="http://schemas.microsoft.com/office/drawing/2014/main" id="{6F4EF6A5-4F1A-42DA-BD73-5620FD463FAE}"/>
               </a:ext>
             </a:extLst>
           </p:cNvPr>
@@ -11627,7 +11827,7 @@
           <p:cNvPr id="15" name="">
             <a:extLst xmlns:a="http://schemas.openxmlformats.org/drawingml/2006/main">
               <a:ext uri="{FF2B5EF4-FFF2-40B4-BE49-F238E27FC236}">
-                <a16:creationId xmlns:a16="http://schemas.microsoft.com/office/drawing/2014/main" id="{BF7B95E0-7EB6-4505-B543-AFACECBC8C0E}"/>
+                <a16:creationId xmlns:a16="http://schemas.microsoft.com/office/drawing/2014/main" id="{E21DB98D-D7F1-4160-BA68-58DECB91CAD7}"/>
               </a:ext>
             </a:extLst>
           </p:cNvPr>
@@ -11682,7 +11882,7 @@
     </p:spTree>
     <p:extLst>
       <p:ext uri="{BB962C8B-B14F-4D97-AF65-F5344CB8AC3E}">
-        <p14:creationId xmlns:p14="http://schemas.microsoft.com/office/powerpoint/2010/main" val="1101850719"/>
+        <p14:creationId xmlns:p14="http://schemas.microsoft.com/office/powerpoint/2010/main" val="1146376432"/>
       </p:ext>
     </p:extLst>
   </p:cSld>
@@ -11837,7 +12037,7 @@
           <p:cNvPr id="23" name="">
             <a:extLst xmlns:a="http://schemas.openxmlformats.org/drawingml/2006/main">
               <a:ext uri="{FF2B5EF4-FFF2-40B4-BE49-F238E27FC236}">
-                <a16:creationId xmlns:a16="http://schemas.microsoft.com/office/drawing/2014/main" id="{1FDC3D30-AF4D-41B8-BE88-FAE740988C71}"/>
+                <a16:creationId xmlns:a16="http://schemas.microsoft.com/office/drawing/2014/main" id="{5BC565A6-9F65-43BA-9296-4176BF1D0115}"/>
               </a:ext>
             </a:extLst>
           </p:cNvPr>
@@ -11869,7 +12069,7 @@
           <p:cNvPr id="2" name="">
             <a:extLst xmlns:a="http://schemas.openxmlformats.org/drawingml/2006/main">
               <a:ext uri="{FF2B5EF4-FFF2-40B4-BE49-F238E27FC236}">
-                <a16:creationId xmlns:a16="http://schemas.microsoft.com/office/drawing/2014/main" id="{A125DCBF-F74E-408D-B919-A0866FC08D3B}"/>
+                <a16:creationId xmlns:a16="http://schemas.microsoft.com/office/drawing/2014/main" id="{4930976C-4D83-441B-9188-726988F49F27}"/>
               </a:ext>
             </a:extLst>
           </p:cNvPr>
@@ -11926,7 +12126,7 @@
           <p:cNvPr id="3" name="">
             <a:extLst xmlns:a="http://schemas.openxmlformats.org/drawingml/2006/main">
               <a:ext uri="{FF2B5EF4-FFF2-40B4-BE49-F238E27FC236}">
-                <a16:creationId xmlns:a16="http://schemas.microsoft.com/office/drawing/2014/main" id="{D7F21880-7588-46E1-A481-178BE803BC8B}"/>
+                <a16:creationId xmlns:a16="http://schemas.microsoft.com/office/drawing/2014/main" id="{79D2A6D2-D3CC-4FFD-964B-E907077220A0}"/>
               </a:ext>
             </a:extLst>
           </p:cNvPr>
@@ -11958,7 +12158,7 @@
           <p:cNvPr id="4" name="">
             <a:extLst xmlns:a="http://schemas.openxmlformats.org/drawingml/2006/main">
               <a:ext uri="{FF2B5EF4-FFF2-40B4-BE49-F238E27FC236}">
-                <a16:creationId xmlns:a16="http://schemas.microsoft.com/office/drawing/2014/main" id="{6BBB8CE2-9A96-404B-B7C9-185F5F185267}"/>
+                <a16:creationId xmlns:a16="http://schemas.microsoft.com/office/drawing/2014/main" id="{C5A758B1-17A5-4731-83A7-FF2413A48DB3}"/>
               </a:ext>
             </a:extLst>
           </p:cNvPr>
@@ -12015,7 +12215,7 @@
           <p:cNvPr id="5" name="">
             <a:extLst xmlns:a="http://schemas.openxmlformats.org/drawingml/2006/main">
               <a:ext uri="{FF2B5EF4-FFF2-40B4-BE49-F238E27FC236}">
-                <a16:creationId xmlns:a16="http://schemas.microsoft.com/office/drawing/2014/main" id="{56A24197-4272-46C6-B11E-6E2604BFBF7B}"/>
+                <a16:creationId xmlns:a16="http://schemas.microsoft.com/office/drawing/2014/main" id="{F28D8367-9CD7-47BB-8B08-9F4985F3BC64}"/>
               </a:ext>
             </a:extLst>
           </p:cNvPr>
@@ -12072,7 +12272,7 @@
           <p:cNvPr id="6" name="">
             <a:extLst xmlns:a="http://schemas.openxmlformats.org/drawingml/2006/main">
               <a:ext uri="{FF2B5EF4-FFF2-40B4-BE49-F238E27FC236}">
-                <a16:creationId xmlns:a16="http://schemas.microsoft.com/office/drawing/2014/main" id="{71E75BB7-ACDA-4BC0-A661-614FDE3C9585}"/>
+                <a16:creationId xmlns:a16="http://schemas.microsoft.com/office/drawing/2014/main" id="{C235EC51-AC3D-4ECF-9FAB-44ABD0B5F30C}"/>
               </a:ext>
             </a:extLst>
           </p:cNvPr>
@@ -12129,7 +12329,7 @@
           <p:cNvPr id="7" name="">
             <a:extLst xmlns:a="http://schemas.openxmlformats.org/drawingml/2006/main">
               <a:ext uri="{FF2B5EF4-FFF2-40B4-BE49-F238E27FC236}">
-                <a16:creationId xmlns:a16="http://schemas.microsoft.com/office/drawing/2014/main" id="{DAA0CD29-2BB3-410F-B66D-7AD72B692CEE}"/>
+                <a16:creationId xmlns:a16="http://schemas.microsoft.com/office/drawing/2014/main" id="{4F63E37A-0D66-4B80-99CD-5E51EA043228}"/>
               </a:ext>
             </a:extLst>
           </p:cNvPr>
@@ -12161,7 +12361,7 @@
           <p:cNvPr id="8" name="">
             <a:extLst xmlns:a="http://schemas.openxmlformats.org/drawingml/2006/main">
               <a:ext uri="{FF2B5EF4-FFF2-40B4-BE49-F238E27FC236}">
-                <a16:creationId xmlns:a16="http://schemas.microsoft.com/office/drawing/2014/main" id="{3E8631BD-5F82-4148-B611-9EB45AB37E35}"/>
+                <a16:creationId xmlns:a16="http://schemas.microsoft.com/office/drawing/2014/main" id="{0F536D5C-0DC6-4B21-B270-06BA1E157006}"/>
               </a:ext>
             </a:extLst>
           </p:cNvPr>
@@ -12218,7 +12418,7 @@
           <p:cNvPr id="9" name="">
             <a:extLst xmlns:a="http://schemas.openxmlformats.org/drawingml/2006/main">
               <a:ext uri="{FF2B5EF4-FFF2-40B4-BE49-F238E27FC236}">
-                <a16:creationId xmlns:a16="http://schemas.microsoft.com/office/drawing/2014/main" id="{A0BEEBE5-D18A-411D-973C-750F5AF32092}"/>
+                <a16:creationId xmlns:a16="http://schemas.microsoft.com/office/drawing/2014/main" id="{2D20B85D-DA1A-4ECF-82E9-925C75F9EC37}"/>
               </a:ext>
             </a:extLst>
           </p:cNvPr>
@@ -12275,7 +12475,7 @@
           <p:cNvPr id="10" name="">
             <a:extLst xmlns:a="http://schemas.openxmlformats.org/drawingml/2006/main">
               <a:ext uri="{FF2B5EF4-FFF2-40B4-BE49-F238E27FC236}">
-                <a16:creationId xmlns:a16="http://schemas.microsoft.com/office/drawing/2014/main" id="{289FD48D-F87A-41F9-84AA-E3211F5DD937}"/>
+                <a16:creationId xmlns:a16="http://schemas.microsoft.com/office/drawing/2014/main" id="{BA3F1CAB-A210-41AF-BE09-52C20251BE00}"/>
               </a:ext>
             </a:extLst>
           </p:cNvPr>
@@ -12309,7 +12509,7 @@
           <p:cNvPr id="11" name="">
             <a:extLst xmlns:a="http://schemas.openxmlformats.org/drawingml/2006/main">
               <a:ext uri="{FF2B5EF4-FFF2-40B4-BE49-F238E27FC236}">
-                <a16:creationId xmlns:a16="http://schemas.microsoft.com/office/drawing/2014/main" id="{1BB4ED56-0D0E-4278-934C-019FADEB19B8}"/>
+                <a16:creationId xmlns:a16="http://schemas.microsoft.com/office/drawing/2014/main" id="{D4799119-DD12-48C1-BC17-E4D86ED2510B}"/>
               </a:ext>
             </a:extLst>
           </p:cNvPr>
@@ -12341,7 +12541,7 @@
           <p:cNvPr id="12" name="">
             <a:extLst xmlns:a="http://schemas.openxmlformats.org/drawingml/2006/main">
               <a:ext uri="{FF2B5EF4-FFF2-40B4-BE49-F238E27FC236}">
-                <a16:creationId xmlns:a16="http://schemas.microsoft.com/office/drawing/2014/main" id="{BED7F3EA-4515-4C1C-883D-83A3DBEAC08B}"/>
+                <a16:creationId xmlns:a16="http://schemas.microsoft.com/office/drawing/2014/main" id="{C4F0B868-E25E-462B-98ED-F2AF96249ECC}"/>
               </a:ext>
             </a:extLst>
           </p:cNvPr>
@@ -12398,7 +12598,7 @@
           <p:cNvPr id="13" name="">
             <a:extLst xmlns:a="http://schemas.openxmlformats.org/drawingml/2006/main">
               <a:ext uri="{FF2B5EF4-FFF2-40B4-BE49-F238E27FC236}">
-                <a16:creationId xmlns:a16="http://schemas.microsoft.com/office/drawing/2014/main" id="{A78A0D68-00C2-465D-9678-69E899B480FD}"/>
+                <a16:creationId xmlns:a16="http://schemas.microsoft.com/office/drawing/2014/main" id="{1529EB71-D714-45A3-B511-A0DEA07458AF}"/>
               </a:ext>
             </a:extLst>
           </p:cNvPr>
@@ -12455,7 +12655,7 @@
           <p:cNvPr id="14" name="">
             <a:extLst xmlns:a="http://schemas.openxmlformats.org/drawingml/2006/main">
               <a:ext uri="{FF2B5EF4-FFF2-40B4-BE49-F238E27FC236}">
-                <a16:creationId xmlns:a16="http://schemas.microsoft.com/office/drawing/2014/main" id="{C94FE952-F21D-4764-B5D0-06C9381CC4CA}"/>
+                <a16:creationId xmlns:a16="http://schemas.microsoft.com/office/drawing/2014/main" id="{C01E2034-4B5A-4AEF-9AD2-2359CDA38A1F}"/>
               </a:ext>
             </a:extLst>
           </p:cNvPr>
@@ -12489,7 +12689,7 @@
           <p:cNvPr id="15" name="">
             <a:extLst xmlns:a="http://schemas.openxmlformats.org/drawingml/2006/main">
               <a:ext uri="{FF2B5EF4-FFF2-40B4-BE49-F238E27FC236}">
-                <a16:creationId xmlns:a16="http://schemas.microsoft.com/office/drawing/2014/main" id="{6C2FBD04-6E67-4549-B962-BF8A4BA8227C}"/>
+                <a16:creationId xmlns:a16="http://schemas.microsoft.com/office/drawing/2014/main" id="{21664D58-704E-462A-8CE5-6F38948D685B}"/>
               </a:ext>
             </a:extLst>
           </p:cNvPr>
@@ -12521,7 +12721,7 @@
           <p:cNvPr id="16" name="">
             <a:extLst xmlns:a="http://schemas.openxmlformats.org/drawingml/2006/main">
               <a:ext uri="{FF2B5EF4-FFF2-40B4-BE49-F238E27FC236}">
-                <a16:creationId xmlns:a16="http://schemas.microsoft.com/office/drawing/2014/main" id="{13B7EB5A-CCCD-4EA2-A554-8D90FBFBB032}"/>
+                <a16:creationId xmlns:a16="http://schemas.microsoft.com/office/drawing/2014/main" id="{F34AF436-E2A8-4557-8A87-AA481E9EA092}"/>
               </a:ext>
             </a:extLst>
           </p:cNvPr>
@@ -12578,7 +12778,7 @@
           <p:cNvPr id="17" name="">
             <a:extLst xmlns:a="http://schemas.openxmlformats.org/drawingml/2006/main">
               <a:ext uri="{FF2B5EF4-FFF2-40B4-BE49-F238E27FC236}">
-                <a16:creationId xmlns:a16="http://schemas.microsoft.com/office/drawing/2014/main" id="{F0E583B6-D8DF-48C6-9116-D5BE03BD6602}"/>
+                <a16:creationId xmlns:a16="http://schemas.microsoft.com/office/drawing/2014/main" id="{390D23B4-29DC-4D02-9310-B24160A2C1B3}"/>
               </a:ext>
             </a:extLst>
           </p:cNvPr>
@@ -12635,7 +12835,7 @@
           <p:cNvPr id="18" name="">
             <a:extLst xmlns:a="http://schemas.openxmlformats.org/drawingml/2006/main">
               <a:ext uri="{FF2B5EF4-FFF2-40B4-BE49-F238E27FC236}">
-                <a16:creationId xmlns:a16="http://schemas.microsoft.com/office/drawing/2014/main" id="{FCB41A26-9A10-488C-A2BE-66BC8CA8AF79}"/>
+                <a16:creationId xmlns:a16="http://schemas.microsoft.com/office/drawing/2014/main" id="{7B3A625E-B757-4D1E-BC0D-D5800BAA82AC}"/>
               </a:ext>
             </a:extLst>
           </p:cNvPr>
@@ -12669,7 +12869,7 @@
           <p:cNvPr id="19" name="">
             <a:extLst xmlns:a="http://schemas.openxmlformats.org/drawingml/2006/main">
               <a:ext uri="{FF2B5EF4-FFF2-40B4-BE49-F238E27FC236}">
-                <a16:creationId xmlns:a16="http://schemas.microsoft.com/office/drawing/2014/main" id="{02BE0B14-A59E-4399-B71F-CC910BE16D89}"/>
+                <a16:creationId xmlns:a16="http://schemas.microsoft.com/office/drawing/2014/main" id="{DD525D5F-2165-43BD-99CE-E406E1E33E00}"/>
               </a:ext>
             </a:extLst>
           </p:cNvPr>
@@ -12701,7 +12901,7 @@
           <p:cNvPr id="20" name="">
             <a:extLst xmlns:a="http://schemas.openxmlformats.org/drawingml/2006/main">
               <a:ext uri="{FF2B5EF4-FFF2-40B4-BE49-F238E27FC236}">
-                <a16:creationId xmlns:a16="http://schemas.microsoft.com/office/drawing/2014/main" id="{0ADF7DBF-4581-4F37-997A-E7F9932EE363}"/>
+                <a16:creationId xmlns:a16="http://schemas.microsoft.com/office/drawing/2014/main" id="{D55FF9AA-979E-436A-AE1B-0469AE133515}"/>
               </a:ext>
             </a:extLst>
           </p:cNvPr>
@@ -12758,7 +12958,7 @@
           <p:cNvPr id="21" name="">
             <a:extLst xmlns:a="http://schemas.openxmlformats.org/drawingml/2006/main">
               <a:ext uri="{FF2B5EF4-FFF2-40B4-BE49-F238E27FC236}">
-                <a16:creationId xmlns:a16="http://schemas.microsoft.com/office/drawing/2014/main" id="{A20D9CF5-C9CB-4DD1-98D5-1A5BBE3ADBF5}"/>
+                <a16:creationId xmlns:a16="http://schemas.microsoft.com/office/drawing/2014/main" id="{C0E352FD-B110-4C4B-A967-6DB624046764}"/>
               </a:ext>
             </a:extLst>
           </p:cNvPr>
@@ -12815,7 +13015,7 @@
           <p:cNvPr id="22" name="">
             <a:extLst xmlns:a="http://schemas.openxmlformats.org/drawingml/2006/main">
               <a:ext uri="{FF2B5EF4-FFF2-40B4-BE49-F238E27FC236}">
-                <a16:creationId xmlns:a16="http://schemas.microsoft.com/office/drawing/2014/main" id="{7A931DCC-98F7-4493-8169-DB599DC2720C}"/>
+                <a16:creationId xmlns:a16="http://schemas.microsoft.com/office/drawing/2014/main" id="{92A63081-AB20-401D-B326-B54E65ABC490}"/>
               </a:ext>
             </a:extLst>
           </p:cNvPr>
@@ -12870,7 +13070,7 @@
     </p:spTree>
     <p:extLst>
       <p:ext uri="{BB962C8B-B14F-4D97-AF65-F5344CB8AC3E}">
-        <p14:creationId xmlns:p14="http://schemas.microsoft.com/office/powerpoint/2010/main" val="417615656"/>
+        <p14:creationId xmlns:p14="http://schemas.microsoft.com/office/powerpoint/2010/main" val="592507583"/>
       </p:ext>
     </p:extLst>
   </p:cSld>
@@ -13071,7 +13271,7 @@
           <p:cNvPr id="22" name="">
             <a:extLst xmlns:a="http://schemas.openxmlformats.org/drawingml/2006/main">
               <a:ext uri="{FF2B5EF4-FFF2-40B4-BE49-F238E27FC236}">
-                <a16:creationId xmlns:a16="http://schemas.microsoft.com/office/drawing/2014/main" id="{4C990CFE-C067-4BE8-822D-860BE6050136}"/>
+                <a16:creationId xmlns:a16="http://schemas.microsoft.com/office/drawing/2014/main" id="{405E5DB2-AE56-40D5-92CD-E20E0A618629}"/>
               </a:ext>
             </a:extLst>
           </p:cNvPr>
@@ -13103,7 +13303,7 @@
           <p:cNvPr id="2" name="">
             <a:extLst xmlns:a="http://schemas.openxmlformats.org/drawingml/2006/main">
               <a:ext uri="{FF2B5EF4-FFF2-40B4-BE49-F238E27FC236}">
-                <a16:creationId xmlns:a16="http://schemas.microsoft.com/office/drawing/2014/main" id="{F3609489-9757-49F2-9140-8C69DD5AEC06}"/>
+                <a16:creationId xmlns:a16="http://schemas.microsoft.com/office/drawing/2014/main" id="{14B43141-D463-4CAA-B7B0-93D5FAD5F938}"/>
               </a:ext>
             </a:extLst>
           </p:cNvPr>
@@ -13160,7 +13360,7 @@
           <p:cNvPr id="3" name="">
             <a:extLst xmlns:a="http://schemas.openxmlformats.org/drawingml/2006/main">
               <a:ext uri="{FF2B5EF4-FFF2-40B4-BE49-F238E27FC236}">
-                <a16:creationId xmlns:a16="http://schemas.microsoft.com/office/drawing/2014/main" id="{1BBFBF8A-CEC3-4C4A-BAAE-FCE01480F983}"/>
+                <a16:creationId xmlns:a16="http://schemas.microsoft.com/office/drawing/2014/main" id="{BBF6452C-C3FA-4FDD-8BC7-43F65E3A25BC}"/>
               </a:ext>
             </a:extLst>
           </p:cNvPr>
@@ -13192,7 +13392,7 @@
           <p:cNvPr id="4" name="">
             <a:extLst xmlns:a="http://schemas.openxmlformats.org/drawingml/2006/main">
               <a:ext uri="{FF2B5EF4-FFF2-40B4-BE49-F238E27FC236}">
-                <a16:creationId xmlns:a16="http://schemas.microsoft.com/office/drawing/2014/main" id="{EEAA9A02-C5AC-4BE9-A96A-8C4814CB35E5}"/>
+                <a16:creationId xmlns:a16="http://schemas.microsoft.com/office/drawing/2014/main" id="{B06B823F-F9C7-4A26-9F22-94E421E945AB}"/>
               </a:ext>
             </a:extLst>
           </p:cNvPr>
@@ -13249,7 +13449,7 @@
           <p:cNvPr id="5" name="">
             <a:extLst xmlns:a="http://schemas.openxmlformats.org/drawingml/2006/main">
               <a:ext uri="{FF2B5EF4-FFF2-40B4-BE49-F238E27FC236}">
-                <a16:creationId xmlns:a16="http://schemas.microsoft.com/office/drawing/2014/main" id="{D7AB9CE1-DCCB-4220-AE7E-391079EED892}"/>
+                <a16:creationId xmlns:a16="http://schemas.microsoft.com/office/drawing/2014/main" id="{B44801CB-6B9D-4332-9502-8F690B50F790}"/>
               </a:ext>
             </a:extLst>
           </p:cNvPr>
@@ -13306,7 +13506,7 @@
           <p:cNvPr id="6" name="">
             <a:extLst xmlns:a="http://schemas.openxmlformats.org/drawingml/2006/main">
               <a:ext uri="{FF2B5EF4-FFF2-40B4-BE49-F238E27FC236}">
-                <a16:creationId xmlns:a16="http://schemas.microsoft.com/office/drawing/2014/main" id="{02CEA5EC-F27E-437A-B192-60E4C720DE9B}"/>
+                <a16:creationId xmlns:a16="http://schemas.microsoft.com/office/drawing/2014/main" id="{9FEE560C-C19A-4E42-B72B-AFE183511781}"/>
               </a:ext>
             </a:extLst>
           </p:cNvPr>
@@ -13363,7 +13563,7 @@
           <p:cNvPr id="7" name="">
             <a:extLst xmlns:a="http://schemas.openxmlformats.org/drawingml/2006/main">
               <a:ext uri="{FF2B5EF4-FFF2-40B4-BE49-F238E27FC236}">
-                <a16:creationId xmlns:a16="http://schemas.microsoft.com/office/drawing/2014/main" id="{757B912E-82D4-408E-A06A-29CA0FC1F484}"/>
+                <a16:creationId xmlns:a16="http://schemas.microsoft.com/office/drawing/2014/main" id="{26166AF2-E611-4C14-8DF9-00F96CA59807}"/>
               </a:ext>
             </a:extLst>
           </p:cNvPr>
@@ -13395,7 +13595,7 @@
           <p:cNvPr id="8" name="">
             <a:extLst xmlns:a="http://schemas.openxmlformats.org/drawingml/2006/main">
               <a:ext uri="{FF2B5EF4-FFF2-40B4-BE49-F238E27FC236}">
-                <a16:creationId xmlns:a16="http://schemas.microsoft.com/office/drawing/2014/main" id="{0381BB62-B723-4439-8EE5-64431BF9225A}"/>
+                <a16:creationId xmlns:a16="http://schemas.microsoft.com/office/drawing/2014/main" id="{93B2DBE1-AEFC-417E-988A-36361DB5FC16}"/>
               </a:ext>
             </a:extLst>
           </p:cNvPr>
@@ -13452,7 +13652,7 @@
           <p:cNvPr id="9" name="">
             <a:extLst xmlns:a="http://schemas.openxmlformats.org/drawingml/2006/main">
               <a:ext uri="{FF2B5EF4-FFF2-40B4-BE49-F238E27FC236}">
-                <a16:creationId xmlns:a16="http://schemas.microsoft.com/office/drawing/2014/main" id="{0B3AF710-F5D2-4A3F-9737-7F8DDAEACFF1}"/>
+                <a16:creationId xmlns:a16="http://schemas.microsoft.com/office/drawing/2014/main" id="{DD267865-0382-4114-B3FB-EF4696AA3B55}"/>
               </a:ext>
             </a:extLst>
           </p:cNvPr>
@@ -13509,7 +13709,7 @@
           <p:cNvPr id="10" name="">
             <a:extLst xmlns:a="http://schemas.openxmlformats.org/drawingml/2006/main">
               <a:ext uri="{FF2B5EF4-FFF2-40B4-BE49-F238E27FC236}">
-                <a16:creationId xmlns:a16="http://schemas.microsoft.com/office/drawing/2014/main" id="{2F5A3659-950F-44E3-BB86-28BBA29DE79C}"/>
+                <a16:creationId xmlns:a16="http://schemas.microsoft.com/office/drawing/2014/main" id="{D6FACA2E-E4EA-472A-9570-2AE2CDF084AC}"/>
               </a:ext>
             </a:extLst>
           </p:cNvPr>
@@ -13543,7 +13743,7 @@
           <p:cNvPr id="11" name="">
             <a:extLst xmlns:a="http://schemas.openxmlformats.org/drawingml/2006/main">
               <a:ext uri="{FF2B5EF4-FFF2-40B4-BE49-F238E27FC236}">
-                <a16:creationId xmlns:a16="http://schemas.microsoft.com/office/drawing/2014/main" id="{CF43F997-CF9C-4A6D-A36D-83470110EB14}"/>
+                <a16:creationId xmlns:a16="http://schemas.microsoft.com/office/drawing/2014/main" id="{A8F6D0B1-721C-48EA-B8E1-724CE809D74A}"/>
               </a:ext>
             </a:extLst>
           </p:cNvPr>
@@ -13575,7 +13775,7 @@
           <p:cNvPr id="12" name="">
             <a:extLst xmlns:a="http://schemas.openxmlformats.org/drawingml/2006/main">
               <a:ext uri="{FF2B5EF4-FFF2-40B4-BE49-F238E27FC236}">
-                <a16:creationId xmlns:a16="http://schemas.microsoft.com/office/drawing/2014/main" id="{B691738B-FAF0-4DD8-AAE2-F3C6E4F5097A}"/>
+                <a16:creationId xmlns:a16="http://schemas.microsoft.com/office/drawing/2014/main" id="{559226EF-13AE-4952-9B0B-17B33AA97FD0}"/>
               </a:ext>
             </a:extLst>
           </p:cNvPr>
@@ -13632,7 +13832,7 @@
           <p:cNvPr id="13" name="">
             <a:extLst xmlns:a="http://schemas.openxmlformats.org/drawingml/2006/main">
               <a:ext uri="{FF2B5EF4-FFF2-40B4-BE49-F238E27FC236}">
-                <a16:creationId xmlns:a16="http://schemas.microsoft.com/office/drawing/2014/main" id="{1EE1EA62-7C7B-4C9A-A8AE-1323436EB28A}"/>
+                <a16:creationId xmlns:a16="http://schemas.microsoft.com/office/drawing/2014/main" id="{C5B75FE1-DE42-43B7-B962-47E52CBB2E8D}"/>
               </a:ext>
             </a:extLst>
           </p:cNvPr>
@@ -13689,7 +13889,7 @@
           <p:cNvPr id="14" name="">
             <a:extLst xmlns:a="http://schemas.openxmlformats.org/drawingml/2006/main">
               <a:ext uri="{FF2B5EF4-FFF2-40B4-BE49-F238E27FC236}">
-                <a16:creationId xmlns:a16="http://schemas.microsoft.com/office/drawing/2014/main" id="{F97CD82E-C841-47A3-97A3-FE9A1398A79F}"/>
+                <a16:creationId xmlns:a16="http://schemas.microsoft.com/office/drawing/2014/main" id="{70C19046-969F-41FB-B064-88B8616328B0}"/>
               </a:ext>
             </a:extLst>
           </p:cNvPr>
@@ -13723,7 +13923,7 @@
           <p:cNvPr id="15" name="">
             <a:extLst xmlns:a="http://schemas.openxmlformats.org/drawingml/2006/main">
               <a:ext uri="{FF2B5EF4-FFF2-40B4-BE49-F238E27FC236}">
-                <a16:creationId xmlns:a16="http://schemas.microsoft.com/office/drawing/2014/main" id="{A27B0E05-1A40-4F64-925F-6624DCD886FC}"/>
+                <a16:creationId xmlns:a16="http://schemas.microsoft.com/office/drawing/2014/main" id="{E10512BE-BF1F-494A-AF02-506E96993310}"/>
               </a:ext>
             </a:extLst>
           </p:cNvPr>
@@ -13755,7 +13955,7 @@
           <p:cNvPr id="16" name="">
             <a:extLst xmlns:a="http://schemas.openxmlformats.org/drawingml/2006/main">
               <a:ext uri="{FF2B5EF4-FFF2-40B4-BE49-F238E27FC236}">
-                <a16:creationId xmlns:a16="http://schemas.microsoft.com/office/drawing/2014/main" id="{850A7098-D131-4654-8A61-E92258A7C7BA}"/>
+                <a16:creationId xmlns:a16="http://schemas.microsoft.com/office/drawing/2014/main" id="{788AD93A-E28F-4F8B-B4C0-B250182FC457}"/>
               </a:ext>
             </a:extLst>
           </p:cNvPr>
@@ -13812,7 +14012,7 @@
           <p:cNvPr id="17" name="">
             <a:extLst xmlns:a="http://schemas.openxmlformats.org/drawingml/2006/main">
               <a:ext uri="{FF2B5EF4-FFF2-40B4-BE49-F238E27FC236}">
-                <a16:creationId xmlns:a16="http://schemas.microsoft.com/office/drawing/2014/main" id="{DBA7E1D1-F8DD-449C-A46C-DEEF5CFE0576}"/>
+                <a16:creationId xmlns:a16="http://schemas.microsoft.com/office/drawing/2014/main" id="{3ADCE504-CC37-4FA1-AF4A-FD7956F9E537}"/>
               </a:ext>
             </a:extLst>
           </p:cNvPr>
@@ -13869,7 +14069,7 @@
           <p:cNvPr id="18" name="">
             <a:extLst xmlns:a="http://schemas.openxmlformats.org/drawingml/2006/main">
               <a:ext uri="{FF2B5EF4-FFF2-40B4-BE49-F238E27FC236}">
-                <a16:creationId xmlns:a16="http://schemas.microsoft.com/office/drawing/2014/main" id="{DF9CA629-E1C3-4EFA-8702-71CDF0087793}"/>
+                <a16:creationId xmlns:a16="http://schemas.microsoft.com/office/drawing/2014/main" id="{C69E0E4B-5C21-40B0-94BB-EC1C6801422A}"/>
               </a:ext>
             </a:extLst>
           </p:cNvPr>
@@ -13903,7 +14103,7 @@
           <p:cNvPr id="19" name="">
             <a:extLst xmlns:a="http://schemas.openxmlformats.org/drawingml/2006/main">
               <a:ext uri="{FF2B5EF4-FFF2-40B4-BE49-F238E27FC236}">
-                <a16:creationId xmlns:a16="http://schemas.microsoft.com/office/drawing/2014/main" id="{94D4F3C6-663B-4AAB-AA8F-6DCCFABBCD89}"/>
+                <a16:creationId xmlns:a16="http://schemas.microsoft.com/office/drawing/2014/main" id="{9B8DE1C6-CE25-4B90-BD28-BDD4AF3539A1}"/>
               </a:ext>
             </a:extLst>
           </p:cNvPr>
@@ -13935,7 +14135,7 @@
           <p:cNvPr id="20" name="">
             <a:extLst xmlns:a="http://schemas.openxmlformats.org/drawingml/2006/main">
               <a:ext uri="{FF2B5EF4-FFF2-40B4-BE49-F238E27FC236}">
-                <a16:creationId xmlns:a16="http://schemas.microsoft.com/office/drawing/2014/main" id="{6F741937-5C65-458C-93B5-653B169DF358}"/>
+                <a16:creationId xmlns:a16="http://schemas.microsoft.com/office/drawing/2014/main" id="{E502ED04-D124-4FC7-BF6D-F19CC433D2F1}"/>
               </a:ext>
             </a:extLst>
           </p:cNvPr>
@@ -13992,7 +14192,7 @@
           <p:cNvPr id="21" name="">
             <a:extLst xmlns:a="http://schemas.openxmlformats.org/drawingml/2006/main">
               <a:ext uri="{FF2B5EF4-FFF2-40B4-BE49-F238E27FC236}">
-                <a16:creationId xmlns:a16="http://schemas.microsoft.com/office/drawing/2014/main" id="{C37E22F4-37C2-48B0-8692-A3D0863B03F3}"/>
+                <a16:creationId xmlns:a16="http://schemas.microsoft.com/office/drawing/2014/main" id="{53F02D00-4816-4406-BDAA-6B8332805FB8}"/>
               </a:ext>
             </a:extLst>
           </p:cNvPr>
@@ -14047,7 +14247,7 @@
     </p:spTree>
     <p:extLst>
       <p:ext uri="{BB962C8B-B14F-4D97-AF65-F5344CB8AC3E}">
-        <p14:creationId xmlns:p14="http://schemas.microsoft.com/office/powerpoint/2010/main" val="198033316"/>
+        <p14:creationId xmlns:p14="http://schemas.microsoft.com/office/powerpoint/2010/main" val="309130474"/>
       </p:ext>
     </p:extLst>
   </p:cSld>
